--- a/Nhóm 02 - Phát triển ứng dụng di động.pptx
+++ b/Nhóm 02 - Phát triển ứng dụng di động.pptx
@@ -5,31 +5,32 @@
     <p:sldMasterId id="2147483648" r:id="rId1"/>
   </p:sldMasterIdLst>
   <p:notesMasterIdLst>
-    <p:notesMasterId r:id="rId24"/>
+    <p:notesMasterId r:id="rId25"/>
   </p:notesMasterIdLst>
   <p:sldIdLst>
     <p:sldId id="256" r:id="rId2"/>
-    <p:sldId id="258" r:id="rId3"/>
-    <p:sldId id="259" r:id="rId4"/>
-    <p:sldId id="260" r:id="rId5"/>
-    <p:sldId id="261" r:id="rId6"/>
-    <p:sldId id="262" r:id="rId7"/>
-    <p:sldId id="263" r:id="rId8"/>
-    <p:sldId id="264" r:id="rId9"/>
-    <p:sldId id="265" r:id="rId10"/>
-    <p:sldId id="271" r:id="rId11"/>
-    <p:sldId id="272" r:id="rId12"/>
-    <p:sldId id="283" r:id="rId13"/>
-    <p:sldId id="278" r:id="rId14"/>
-    <p:sldId id="284" r:id="rId15"/>
-    <p:sldId id="279" r:id="rId16"/>
-    <p:sldId id="280" r:id="rId17"/>
-    <p:sldId id="266" r:id="rId18"/>
-    <p:sldId id="268" r:id="rId19"/>
-    <p:sldId id="270" r:id="rId20"/>
-    <p:sldId id="281" r:id="rId21"/>
-    <p:sldId id="282" r:id="rId22"/>
-    <p:sldId id="267" r:id="rId23"/>
+    <p:sldId id="286" r:id="rId3"/>
+    <p:sldId id="258" r:id="rId4"/>
+    <p:sldId id="259" r:id="rId5"/>
+    <p:sldId id="260" r:id="rId6"/>
+    <p:sldId id="261" r:id="rId7"/>
+    <p:sldId id="262" r:id="rId8"/>
+    <p:sldId id="263" r:id="rId9"/>
+    <p:sldId id="264" r:id="rId10"/>
+    <p:sldId id="265" r:id="rId11"/>
+    <p:sldId id="271" r:id="rId12"/>
+    <p:sldId id="272" r:id="rId13"/>
+    <p:sldId id="283" r:id="rId14"/>
+    <p:sldId id="278" r:id="rId15"/>
+    <p:sldId id="284" r:id="rId16"/>
+    <p:sldId id="279" r:id="rId17"/>
+    <p:sldId id="280" r:id="rId18"/>
+    <p:sldId id="266" r:id="rId19"/>
+    <p:sldId id="268" r:id="rId20"/>
+    <p:sldId id="270" r:id="rId21"/>
+    <p:sldId id="281" r:id="rId22"/>
+    <p:sldId id="282" r:id="rId23"/>
+    <p:sldId id="267" r:id="rId24"/>
   </p:sldIdLst>
   <p:sldSz cx="12192000" cy="6858000"/>
   <p:notesSz cx="6858000" cy="9144000"/>
@@ -561,7 +562,7 @@
           <a:p>
             <a:fld id="{5E61AA1F-3D37-4BC9-BF51-8A85D76E59E7}" type="slidenum">
               <a:rPr lang="en-US" smtClean="0"/>
-              <a:t>15</a:t>
+              <a:t>9</a:t>
             </a:fld>
             <a:endParaRPr lang="en-US"/>
           </a:p>
@@ -570,7 +571,7 @@
     </p:spTree>
     <p:extLst>
       <p:ext uri="{BB962C8B-B14F-4D97-AF65-F5344CB8AC3E}">
-        <p14:creationId xmlns:p14="http://schemas.microsoft.com/office/powerpoint/2010/main" val="2217669787"/>
+        <p14:creationId xmlns:p14="http://schemas.microsoft.com/office/powerpoint/2010/main" val="871727624"/>
       </p:ext>
     </p:extLst>
   </p:cSld>
@@ -645,7 +646,91 @@
           <a:p>
             <a:fld id="{5E61AA1F-3D37-4BC9-BF51-8A85D76E59E7}" type="slidenum">
               <a:rPr lang="en-US" smtClean="0"/>
-              <a:t>18</a:t>
+              <a:t>16</a:t>
+            </a:fld>
+            <a:endParaRPr lang="en-US"/>
+          </a:p>
+        </p:txBody>
+      </p:sp>
+    </p:spTree>
+    <p:extLst>
+      <p:ext uri="{BB962C8B-B14F-4D97-AF65-F5344CB8AC3E}">
+        <p14:creationId xmlns:p14="http://schemas.microsoft.com/office/powerpoint/2010/main" val="2217669787"/>
+      </p:ext>
+    </p:extLst>
+  </p:cSld>
+  <p:clrMapOvr>
+    <a:masterClrMapping/>
+  </p:clrMapOvr>
+</p:notes>
+</file>
+
+<file path=ppt/notesSlides/notesSlide3.xml><?xml version="1.0" encoding="utf-8"?>
+<p:notes xmlns:a="http://schemas.openxmlformats.org/drawingml/2006/main" xmlns:r="http://schemas.openxmlformats.org/officeDocument/2006/relationships" xmlns:p="http://schemas.openxmlformats.org/presentationml/2006/main">
+  <p:cSld>
+    <p:spTree>
+      <p:nvGrpSpPr>
+        <p:cNvPr id="1" name=""/>
+        <p:cNvGrpSpPr/>
+        <p:nvPr/>
+      </p:nvGrpSpPr>
+      <p:grpSpPr>
+        <a:xfrm>
+          <a:off x="0" y="0"/>
+          <a:ext cx="0" cy="0"/>
+          <a:chOff x="0" y="0"/>
+          <a:chExt cx="0" cy="0"/>
+        </a:xfrm>
+      </p:grpSpPr>
+      <p:sp>
+        <p:nvSpPr>
+          <p:cNvPr id="2" name="Slide Image Placeholder 1"/>
+          <p:cNvSpPr>
+            <a:spLocks noGrp="1" noRot="1" noChangeAspect="1"/>
+          </p:cNvSpPr>
+          <p:nvPr>
+            <p:ph type="sldImg"/>
+          </p:nvPr>
+        </p:nvSpPr>
+        <p:spPr/>
+      </p:sp>
+      <p:sp>
+        <p:nvSpPr>
+          <p:cNvPr id="3" name="Notes Placeholder 2"/>
+          <p:cNvSpPr>
+            <a:spLocks noGrp="1"/>
+          </p:cNvSpPr>
+          <p:nvPr>
+            <p:ph type="body" idx="1"/>
+          </p:nvPr>
+        </p:nvSpPr>
+        <p:spPr/>
+        <p:txBody>
+          <a:bodyPr/>
+          <a:lstStyle/>
+          <a:p>
+            <a:endParaRPr lang="en-US" dirty="0"/>
+          </a:p>
+        </p:txBody>
+      </p:sp>
+      <p:sp>
+        <p:nvSpPr>
+          <p:cNvPr id="4" name="Slide Number Placeholder 3"/>
+          <p:cNvSpPr>
+            <a:spLocks noGrp="1"/>
+          </p:cNvSpPr>
+          <p:nvPr>
+            <p:ph type="sldNum" sz="quarter" idx="5"/>
+          </p:nvPr>
+        </p:nvSpPr>
+        <p:spPr/>
+        <p:txBody>
+          <a:bodyPr/>
+          <a:lstStyle/>
+          <a:p>
+            <a:fld id="{5E61AA1F-3D37-4BC9-BF51-8A85D76E59E7}" type="slidenum">
+              <a:rPr lang="en-US" smtClean="0"/>
+              <a:t>19</a:t>
             </a:fld>
             <a:endParaRPr lang="en-US"/>
           </a:p>
@@ -3647,8 +3732,8 @@
         </p:nvSpPr>
         <p:spPr>
           <a:xfrm>
-            <a:off x="3628660" y="2726977"/>
-            <a:ext cx="4934679" cy="822870"/>
+            <a:off x="1563153" y="2726977"/>
+            <a:ext cx="9065694" cy="889667"/>
           </a:xfrm>
           <a:prstGeom prst="rect">
             <a:avLst/>
@@ -3667,7 +3752,7 @@
               </a:lnSpc>
             </a:pPr>
             <a:r>
-              <a:rPr sz="5400" b="1" i="0" u="none" dirty="0" err="1">
+              <a:rPr sz="8800" b="1" i="0" u="none" dirty="0" err="1">
                 <a:solidFill>
                   <a:srgbClr val="005088"/>
                 </a:solidFill>
@@ -3676,7 +3761,7 @@
               <a:t>ProGroup</a:t>
             </a:r>
             <a:r>
-              <a:rPr sz="5400" b="1" i="0" u="none" dirty="0">
+              <a:rPr sz="8800" b="1" i="0" u="none" dirty="0">
                 <a:solidFill>
                   <a:srgbClr val="005088"/>
                 </a:solidFill>
@@ -3695,8 +3780,8 @@
         </p:nvSpPr>
         <p:spPr>
           <a:xfrm>
-            <a:off x="3144713" y="3787973"/>
-            <a:ext cx="5902572" cy="313804"/>
+            <a:off x="674075" y="3787973"/>
+            <a:ext cx="10843848" cy="367858"/>
           </a:xfrm>
           <a:prstGeom prst="rect">
             <a:avLst/>
@@ -3715,7 +3800,7 @@
               </a:lnSpc>
             </a:pPr>
             <a:r>
-              <a:rPr sz="1800" b="0" i="1" u="none" dirty="0" err="1">
+              <a:rPr sz="3600" b="0" i="1" u="none" dirty="0" err="1">
                 <a:solidFill>
                   <a:srgbClr val="475569"/>
                 </a:solidFill>
@@ -3724,7 +3809,7 @@
               <a:t>Hệ</a:t>
             </a:r>
             <a:r>
-              <a:rPr sz="1800" b="0" i="1" u="none" dirty="0">
+              <a:rPr sz="3600" b="0" i="1" u="none" dirty="0">
                 <a:solidFill>
                   <a:srgbClr val="475569"/>
                 </a:solidFill>
@@ -3733,7 +3818,7 @@
               <a:t> </a:t>
             </a:r>
             <a:r>
-              <a:rPr sz="1800" b="0" i="1" u="none" dirty="0" err="1">
+              <a:rPr sz="3600" b="0" i="1" u="none" dirty="0" err="1">
                 <a:solidFill>
                   <a:srgbClr val="475569"/>
                 </a:solidFill>
@@ -3742,7 +3827,7 @@
               <a:t>thống</a:t>
             </a:r>
             <a:r>
-              <a:rPr sz="1800" b="0" i="1" u="none" dirty="0">
+              <a:rPr sz="3600" b="0" i="1" u="none" dirty="0">
                 <a:solidFill>
                   <a:srgbClr val="475569"/>
                 </a:solidFill>
@@ -3751,7 +3836,7 @@
               <a:t> </a:t>
             </a:r>
             <a:r>
-              <a:rPr sz="1800" b="0" i="1" u="none" dirty="0" err="1">
+              <a:rPr sz="3600" b="0" i="1" u="none" dirty="0" err="1">
                 <a:solidFill>
                   <a:srgbClr val="475569"/>
                 </a:solidFill>
@@ -3760,7 +3845,7 @@
               <a:t>Hỗ</a:t>
             </a:r>
             <a:r>
-              <a:rPr sz="1800" b="0" i="1" u="none" dirty="0">
+              <a:rPr sz="3600" b="0" i="1" u="none" dirty="0">
                 <a:solidFill>
                   <a:srgbClr val="475569"/>
                 </a:solidFill>
@@ -3769,7 +3854,7 @@
               <a:t> </a:t>
             </a:r>
             <a:r>
-              <a:rPr sz="1800" b="0" i="1" u="none" dirty="0" err="1">
+              <a:rPr sz="3600" b="0" i="1" u="none" dirty="0" err="1">
                 <a:solidFill>
                   <a:srgbClr val="475569"/>
                 </a:solidFill>
@@ -3778,7 +3863,7 @@
               <a:t>trợ</a:t>
             </a:r>
             <a:r>
-              <a:rPr sz="1800" b="0" i="1" u="none" dirty="0">
+              <a:rPr sz="3600" b="0" i="1" u="none" dirty="0">
                 <a:solidFill>
                   <a:srgbClr val="475569"/>
                 </a:solidFill>
@@ -3787,7 +3872,7 @@
               <a:t> </a:t>
             </a:r>
             <a:r>
-              <a:rPr sz="1800" b="0" i="1" u="none" dirty="0" err="1">
+              <a:rPr sz="3600" b="0" i="1" u="none" dirty="0" err="1">
                 <a:solidFill>
                   <a:srgbClr val="475569"/>
                 </a:solidFill>
@@ -3796,7 +3881,7 @@
               <a:t>Đăng</a:t>
             </a:r>
             <a:r>
-              <a:rPr sz="1800" b="0" i="1" u="none" dirty="0">
+              <a:rPr sz="3600" b="0" i="1" u="none" dirty="0">
                 <a:solidFill>
                   <a:srgbClr val="475569"/>
                 </a:solidFill>
@@ -3805,7 +3890,7 @@
               <a:t> </a:t>
             </a:r>
             <a:r>
-              <a:rPr sz="1800" b="0" i="1" u="none" dirty="0" err="1">
+              <a:rPr sz="3600" b="0" i="1" u="none" dirty="0" err="1">
                 <a:solidFill>
                   <a:srgbClr val="475569"/>
                 </a:solidFill>
@@ -3814,7 +3899,7 @@
               <a:t>ký</a:t>
             </a:r>
             <a:r>
-              <a:rPr sz="1800" b="0" i="1" u="none" dirty="0">
+              <a:rPr sz="3600" b="0" i="1" u="none" dirty="0">
                 <a:solidFill>
                   <a:srgbClr val="475569"/>
                 </a:solidFill>
@@ -3823,7 +3908,7 @@
               <a:t> </a:t>
             </a:r>
             <a:r>
-              <a:rPr sz="1800" b="0" i="1" u="none" dirty="0" err="1">
+              <a:rPr sz="3600" b="0" i="1" u="none" dirty="0" err="1">
                 <a:solidFill>
                   <a:srgbClr val="475569"/>
                 </a:solidFill>
@@ -3832,7 +3917,7 @@
               <a:t>Nhóm</a:t>
             </a:r>
             <a:r>
-              <a:rPr sz="1800" b="0" i="1" u="none" dirty="0">
+              <a:rPr sz="3600" b="0" i="1" u="none" dirty="0">
                 <a:solidFill>
                   <a:srgbClr val="475569"/>
                 </a:solidFill>
@@ -3841,7 +3926,7 @@
               <a:t> </a:t>
             </a:r>
             <a:r>
-              <a:rPr sz="1800" b="0" i="1" u="none" dirty="0" err="1">
+              <a:rPr sz="3600" b="0" i="1" u="none" dirty="0" err="1">
                 <a:solidFill>
                   <a:srgbClr val="475569"/>
                 </a:solidFill>
@@ -3850,7 +3935,7 @@
               <a:t>và</a:t>
             </a:r>
             <a:r>
-              <a:rPr sz="1800" b="0" i="1" u="none" dirty="0">
+              <a:rPr sz="3600" b="0" i="1" u="none" dirty="0">
                 <a:solidFill>
                   <a:srgbClr val="475569"/>
                 </a:solidFill>
@@ -3859,7 +3944,7 @@
               <a:t> </a:t>
             </a:r>
             <a:r>
-              <a:rPr sz="1800" b="0" i="1" u="none" dirty="0" err="1">
+              <a:rPr sz="3600" b="0" i="1" u="none" dirty="0" err="1">
                 <a:solidFill>
                   <a:srgbClr val="475569"/>
                 </a:solidFill>
@@ -3868,7 +3953,7 @@
               <a:t>Đồ</a:t>
             </a:r>
             <a:r>
-              <a:rPr sz="1800" b="0" i="1" u="none" dirty="0">
+              <a:rPr sz="3600" b="0" i="1" u="none" dirty="0">
                 <a:solidFill>
                   <a:srgbClr val="475569"/>
                 </a:solidFill>
@@ -3877,7 +3962,7 @@
               <a:t> </a:t>
             </a:r>
             <a:r>
-              <a:rPr sz="1800" b="0" i="1" u="none" dirty="0" err="1">
+              <a:rPr sz="3600" b="0" i="1" u="none" dirty="0" err="1">
                 <a:solidFill>
                   <a:srgbClr val="475569"/>
                 </a:solidFill>
@@ -3886,7 +3971,7 @@
               <a:t>án</a:t>
             </a:r>
             <a:r>
-              <a:rPr sz="1800" b="0" i="1" u="none" dirty="0">
+              <a:rPr sz="3600" b="0" i="1" u="none" dirty="0">
                 <a:solidFill>
                   <a:srgbClr val="475569"/>
                 </a:solidFill>
@@ -3895,7 +3980,7 @@
               <a:t> Môn </a:t>
             </a:r>
             <a:r>
-              <a:rPr sz="1800" b="0" i="1" u="none" dirty="0" err="1">
+              <a:rPr sz="3600" b="0" i="1" u="none" dirty="0" err="1">
                 <a:solidFill>
                   <a:srgbClr val="475569"/>
                 </a:solidFill>
@@ -3903,7 +3988,7 @@
               </a:rPr>
               <a:t>học</a:t>
             </a:r>
-            <a:endParaRPr sz="1800" b="0" i="1" u="none" dirty="0">
+            <a:endParaRPr sz="3600" b="0" i="1" u="none" dirty="0">
               <a:solidFill>
                 <a:srgbClr val="475569"/>
               </a:solidFill>
@@ -3921,6 +4006,138 @@
 </file>
 
 <file path=ppt/slides/slide10.xml><?xml version="1.0" encoding="utf-8"?>
+<p:sld xmlns:a="http://schemas.openxmlformats.org/drawingml/2006/main" xmlns:r="http://schemas.openxmlformats.org/officeDocument/2006/relationships" xmlns:p="http://schemas.openxmlformats.org/presentationml/2006/main">
+  <p:cSld>
+    <p:bg>
+      <p:bgPr>
+        <a:solidFill>
+          <a:srgbClr val="FFFFFF"/>
+        </a:solidFill>
+        <a:effectLst/>
+      </p:bgPr>
+    </p:bg>
+    <p:spTree>
+      <p:nvGrpSpPr>
+        <p:cNvPr id="1" name=""/>
+        <p:cNvGrpSpPr/>
+        <p:nvPr/>
+      </p:nvGrpSpPr>
+      <p:grpSpPr>
+        <a:xfrm>
+          <a:off x="0" y="0"/>
+          <a:ext cx="0" cy="0"/>
+          <a:chOff x="0" y="0"/>
+          <a:chExt cx="0" cy="0"/>
+        </a:xfrm>
+      </p:grpSpPr>
+      <p:pic>
+        <p:nvPicPr>
+          <p:cNvPr id="2" name="Picture 1" descr="image.png"/>
+          <p:cNvPicPr>
+            <a:picLocks noChangeAspect="1"/>
+          </p:cNvPicPr>
+          <p:nvPr/>
+        </p:nvPicPr>
+        <p:blipFill>
+          <a:blip r:embed="rId2"/>
+          <a:stretch>
+            <a:fillRect/>
+          </a:stretch>
+        </p:blipFill>
+        <p:spPr>
+          <a:xfrm>
+            <a:off x="0" y="0"/>
+            <a:ext cx="12192000" cy="6858000"/>
+          </a:xfrm>
+          <a:prstGeom prst="rect">
+            <a:avLst/>
+          </a:prstGeom>
+        </p:spPr>
+      </p:pic>
+      <p:sp>
+        <p:nvSpPr>
+          <p:cNvPr id="4" name="TextBox 3"/>
+          <p:cNvSpPr txBox="1"/>
+          <p:nvPr/>
+        </p:nvSpPr>
+        <p:spPr>
+          <a:xfrm>
+            <a:off x="951035" y="2633493"/>
+            <a:ext cx="2864827" cy="1591013"/>
+          </a:xfrm>
+          <a:prstGeom prst="rect">
+            <a:avLst/>
+          </a:prstGeom>
+          <a:noFill/>
+        </p:spPr>
+        <p:txBody>
+          <a:bodyPr wrap="square" lIns="0" tIns="0" rIns="0" bIns="0" anchor="t">
+            <a:spAutoFit/>
+          </a:bodyPr>
+          <a:lstStyle/>
+          <a:p>
+            <a:pPr algn="ctr">
+              <a:lnSpc>
+                <a:spcPts val="6480"/>
+              </a:lnSpc>
+            </a:pPr>
+            <a:r>
+              <a:rPr lang="en-US" sz="4400" b="1" dirty="0">
+                <a:solidFill>
+                  <a:srgbClr val="005088"/>
+                </a:solidFill>
+                <a:latin typeface="Times New Roman"/>
+              </a:rPr>
+              <a:t>SƠ DỒ USE CASE</a:t>
+            </a:r>
+            <a:endParaRPr sz="4400" b="1" dirty="0">
+              <a:solidFill>
+                <a:srgbClr val="005088"/>
+              </a:solidFill>
+              <a:latin typeface="Times New Roman"/>
+            </a:endParaRPr>
+          </a:p>
+        </p:txBody>
+      </p:sp>
+      <p:pic>
+        <p:nvPicPr>
+          <p:cNvPr id="7" name="Picture 6">
+            <a:extLst>
+              <a:ext uri="{FF2B5EF4-FFF2-40B4-BE49-F238E27FC236}">
+                <a16:creationId xmlns:a16="http://schemas.microsoft.com/office/drawing/2014/main" id="{F9F0DB04-444D-1480-9F57-CB88233AD4BA}"/>
+              </a:ext>
+            </a:extLst>
+          </p:cNvPr>
+          <p:cNvPicPr>
+            <a:picLocks noChangeAspect="1"/>
+          </p:cNvPicPr>
+          <p:nvPr/>
+        </p:nvPicPr>
+        <p:blipFill>
+          <a:blip r:embed="rId3"/>
+          <a:stretch>
+            <a:fillRect/>
+          </a:stretch>
+        </p:blipFill>
+        <p:spPr>
+          <a:xfrm>
+            <a:off x="4714142" y="0"/>
+            <a:ext cx="6000750" cy="6858000"/>
+          </a:xfrm>
+          <a:prstGeom prst="rect">
+            <a:avLst/>
+          </a:prstGeom>
+        </p:spPr>
+      </p:pic>
+    </p:spTree>
+  </p:cSld>
+  <p:clrMapOvr>
+    <a:masterClrMapping/>
+  </p:clrMapOvr>
+</p:sld>
+</file>
+
+<file path=ppt/slides/slide11.xml><?xml version="1.0" encoding="utf-8"?>
 <p:sld xmlns:a="http://schemas.openxmlformats.org/drawingml/2006/main" xmlns:r="http://schemas.openxmlformats.org/officeDocument/2006/relationships" xmlns:p="http://schemas.openxmlformats.org/presentationml/2006/main">
   <p:cSld>
     <p:spTree>
@@ -4001,7 +4218,7 @@
 </p:sld>
 </file>
 
-<file path=ppt/slides/slide11.xml><?xml version="1.0" encoding="utf-8"?>
+<file path=ppt/slides/slide12.xml><?xml version="1.0" encoding="utf-8"?>
 <p:sld xmlns:a="http://schemas.openxmlformats.org/drawingml/2006/main" xmlns:r="http://schemas.openxmlformats.org/officeDocument/2006/relationships" xmlns:p="http://schemas.openxmlformats.org/presentationml/2006/main">
   <p:cSld>
     <p:spTree>
@@ -4112,7 +4329,7 @@
 </p:sld>
 </file>
 
-<file path=ppt/slides/slide12.xml><?xml version="1.0" encoding="utf-8"?>
+<file path=ppt/slides/slide13.xml><?xml version="1.0" encoding="utf-8"?>
 <p:sld xmlns:a="http://schemas.openxmlformats.org/drawingml/2006/main" xmlns:r="http://schemas.openxmlformats.org/officeDocument/2006/relationships" xmlns:p="http://schemas.openxmlformats.org/presentationml/2006/main">
   <p:cSld>
     <p:spTree>
@@ -4385,7 +4602,7 @@
 </p:sld>
 </file>
 
-<file path=ppt/slides/slide13.xml><?xml version="1.0" encoding="utf-8"?>
+<file path=ppt/slides/slide14.xml><?xml version="1.0" encoding="utf-8"?>
 <p:sld xmlns:a="http://schemas.openxmlformats.org/drawingml/2006/main" xmlns:r="http://schemas.openxmlformats.org/officeDocument/2006/relationships" xmlns:p="http://schemas.openxmlformats.org/presentationml/2006/main">
   <p:cSld>
     <p:spTree>
@@ -4422,7 +4639,7 @@
         </p:nvSpPr>
         <p:spPr>
           <a:xfrm>
-            <a:off x="2459369" y="5855469"/>
+            <a:off x="2657997" y="5855469"/>
             <a:ext cx="2561494" cy="685252"/>
           </a:xfrm>
           <a:prstGeom prst="rect">
@@ -4481,7 +4698,7 @@
         </p:blipFill>
         <p:spPr>
           <a:xfrm>
-            <a:off x="1989112" y="135860"/>
+            <a:off x="2187740" y="135860"/>
             <a:ext cx="3756986" cy="6035563"/>
           </a:xfrm>
           <a:prstGeom prst="rect">
@@ -4511,7 +4728,7 @@
         </p:blipFill>
         <p:spPr>
           <a:xfrm>
-            <a:off x="5897372" y="105377"/>
+            <a:off x="6096000" y="105377"/>
             <a:ext cx="3787468" cy="6096528"/>
           </a:xfrm>
           <a:prstGeom prst="rect">
@@ -4533,7 +4750,7 @@
         </p:nvSpPr>
         <p:spPr>
           <a:xfrm>
-            <a:off x="5897372" y="5855469"/>
+            <a:off x="6096000" y="5855469"/>
             <a:ext cx="3384192" cy="685252"/>
           </a:xfrm>
           <a:prstGeom prst="rect">
@@ -4583,7 +4800,7 @@
 </p:sld>
 </file>
 
-<file path=ppt/slides/slide14.xml><?xml version="1.0" encoding="utf-8"?>
+<file path=ppt/slides/slide15.xml><?xml version="1.0" encoding="utf-8"?>
 <p:sld xmlns:a="http://schemas.openxmlformats.org/drawingml/2006/main" xmlns:r="http://schemas.openxmlformats.org/officeDocument/2006/relationships" xmlns:p="http://schemas.openxmlformats.org/presentationml/2006/main">
   <p:cSld>
     <p:spTree>
@@ -4856,7 +5073,7 @@
 </p:sld>
 </file>
 
-<file path=ppt/slides/slide15.xml><?xml version="1.0" encoding="utf-8"?>
+<file path=ppt/slides/slide16.xml><?xml version="1.0" encoding="utf-8"?>
 <p:sld xmlns:a="http://schemas.openxmlformats.org/drawingml/2006/main" xmlns:r="http://schemas.openxmlformats.org/officeDocument/2006/relationships" xmlns:p="http://schemas.openxmlformats.org/presentationml/2006/main">
   <p:cSld>
     <p:spTree>
@@ -5063,7 +5280,7 @@
 </p:sld>
 </file>
 
-<file path=ppt/slides/slide16.xml><?xml version="1.0" encoding="utf-8"?>
+<file path=ppt/slides/slide17.xml><?xml version="1.0" encoding="utf-8"?>
 <p:sld xmlns:a="http://schemas.openxmlformats.org/drawingml/2006/main" xmlns:r="http://schemas.openxmlformats.org/officeDocument/2006/relationships" xmlns:p="http://schemas.openxmlformats.org/presentationml/2006/main">
   <p:cSld>
     <p:spTree>
@@ -5270,7 +5487,7 @@
 </p:sld>
 </file>
 
-<file path=ppt/slides/slide17.xml><?xml version="1.0" encoding="utf-8"?>
+<file path=ppt/slides/slide18.xml><?xml version="1.0" encoding="utf-8"?>
 <p:sld xmlns:a="http://schemas.openxmlformats.org/drawingml/2006/main" xmlns:r="http://schemas.openxmlformats.org/officeDocument/2006/relationships" xmlns:p="http://schemas.openxmlformats.org/presentationml/2006/main">
   <p:cSld>
     <p:spTree>
@@ -5914,7 +6131,7 @@
 </p:sld>
 </file>
 
-<file path=ppt/slides/slide18.xml><?xml version="1.0" encoding="utf-8"?>
+<file path=ppt/slides/slide19.xml><?xml version="1.0" encoding="utf-8"?>
 <p:sld xmlns:a="http://schemas.openxmlformats.org/drawingml/2006/main" xmlns:r="http://schemas.openxmlformats.org/officeDocument/2006/relationships" xmlns:p="http://schemas.openxmlformats.org/presentationml/2006/main">
   <p:cSld>
     <p:spTree>
@@ -15040,7 +15257,94 @@
 </p:sld>
 </file>
 
-<file path=ppt/slides/slide19.xml><?xml version="1.0" encoding="utf-8"?>
+<file path=ppt/slides/slide2.xml><?xml version="1.0" encoding="utf-8"?>
+<p:sld xmlns:a="http://schemas.openxmlformats.org/drawingml/2006/main" xmlns:r="http://schemas.openxmlformats.org/officeDocument/2006/relationships" xmlns:p="http://schemas.openxmlformats.org/presentationml/2006/main">
+  <p:cSld>
+    <p:spTree>
+      <p:nvGrpSpPr>
+        <p:cNvPr id="1" name="">
+          <a:extLst>
+            <a:ext uri="{FF2B5EF4-FFF2-40B4-BE49-F238E27FC236}">
+              <a16:creationId xmlns:a16="http://schemas.microsoft.com/office/drawing/2014/main" id="{3632BBF4-07F9-4DD5-F03A-1A0C61B5506D}"/>
+            </a:ext>
+          </a:extLst>
+        </p:cNvPr>
+        <p:cNvGrpSpPr/>
+        <p:nvPr/>
+      </p:nvGrpSpPr>
+      <p:grpSpPr>
+        <a:xfrm>
+          <a:off x="0" y="0"/>
+          <a:ext cx="0" cy="0"/>
+          <a:chOff x="0" y="0"/>
+          <a:chExt cx="0" cy="0"/>
+        </a:xfrm>
+      </p:grpSpPr>
+      <p:sp>
+        <p:nvSpPr>
+          <p:cNvPr id="3" name="TextBox 2">
+            <a:extLst>
+              <a:ext uri="{FF2B5EF4-FFF2-40B4-BE49-F238E27FC236}">
+                <a16:creationId xmlns:a16="http://schemas.microsoft.com/office/drawing/2014/main" id="{0A266626-90EE-3E5C-DF47-2B6804ECAD56}"/>
+              </a:ext>
+            </a:extLst>
+          </p:cNvPr>
+          <p:cNvSpPr txBox="1"/>
+          <p:nvPr/>
+        </p:nvSpPr>
+        <p:spPr>
+          <a:xfrm>
+            <a:off x="331176" y="2726977"/>
+            <a:ext cx="11529648" cy="787460"/>
+          </a:xfrm>
+          <a:prstGeom prst="rect">
+            <a:avLst/>
+          </a:prstGeom>
+          <a:noFill/>
+        </p:spPr>
+        <p:txBody>
+          <a:bodyPr wrap="square" lIns="0" tIns="0" rIns="0" bIns="0" anchor="t">
+            <a:spAutoFit/>
+          </a:bodyPr>
+          <a:lstStyle/>
+          <a:p>
+            <a:pPr algn="ctr">
+              <a:lnSpc>
+                <a:spcPts val="6480"/>
+              </a:lnSpc>
+            </a:pPr>
+            <a:r>
+              <a:rPr lang="en-US" sz="5400" b="1" i="0" u="none" dirty="0">
+                <a:solidFill>
+                  <a:srgbClr val="005088"/>
+                </a:solidFill>
+                <a:latin typeface="Times New Roman"/>
+              </a:rPr>
+              <a:t>KHẢO SÁT ĐỀ TÀI VÀ NGHIỆP VỤ</a:t>
+            </a:r>
+            <a:endParaRPr sz="5400" b="1" i="0" u="none" dirty="0">
+              <a:solidFill>
+                <a:srgbClr val="005088"/>
+              </a:solidFill>
+              <a:latin typeface="Times New Roman"/>
+            </a:endParaRPr>
+          </a:p>
+        </p:txBody>
+      </p:sp>
+    </p:spTree>
+    <p:extLst>
+      <p:ext uri="{BB962C8B-B14F-4D97-AF65-F5344CB8AC3E}">
+        <p14:creationId xmlns:p14="http://schemas.microsoft.com/office/powerpoint/2010/main" val="2761583307"/>
+      </p:ext>
+    </p:extLst>
+  </p:cSld>
+  <p:clrMapOvr>
+    <a:masterClrMapping/>
+  </p:clrMapOvr>
+</p:sld>
+</file>
+
+<file path=ppt/slides/slide20.xml><?xml version="1.0" encoding="utf-8"?>
 <p:sld xmlns:a="http://schemas.openxmlformats.org/drawingml/2006/main" xmlns:r="http://schemas.openxmlformats.org/officeDocument/2006/relationships" xmlns:p="http://schemas.openxmlformats.org/presentationml/2006/main">
   <p:cSld>
     <p:spTree>
@@ -19693,919 +19997,7 @@
 </p:sld>
 </file>
 
-<file path=ppt/slides/slide2.xml><?xml version="1.0" encoding="utf-8"?>
-<p:sld xmlns:a="http://schemas.openxmlformats.org/drawingml/2006/main" xmlns:r="http://schemas.openxmlformats.org/officeDocument/2006/relationships" xmlns:p="http://schemas.openxmlformats.org/presentationml/2006/main">
-  <p:cSld>
-    <p:bg>
-      <p:bgPr>
-        <a:solidFill>
-          <a:srgbClr val="FFFFFF"/>
-        </a:solidFill>
-        <a:effectLst/>
-      </p:bgPr>
-    </p:bg>
-    <p:spTree>
-      <p:nvGrpSpPr>
-        <p:cNvPr id="1" name=""/>
-        <p:cNvGrpSpPr/>
-        <p:nvPr/>
-      </p:nvGrpSpPr>
-      <p:grpSpPr>
-        <a:xfrm>
-          <a:off x="0" y="0"/>
-          <a:ext cx="0" cy="0"/>
-          <a:chOff x="0" y="0"/>
-          <a:chExt cx="0" cy="0"/>
-        </a:xfrm>
-      </p:grpSpPr>
-      <p:pic>
-        <p:nvPicPr>
-          <p:cNvPr id="2" name="Picture 1" descr="image.png"/>
-          <p:cNvPicPr>
-            <a:picLocks noChangeAspect="1"/>
-          </p:cNvPicPr>
-          <p:nvPr/>
-        </p:nvPicPr>
-        <p:blipFill>
-          <a:blip r:embed="rId2"/>
-          <a:stretch>
-            <a:fillRect/>
-          </a:stretch>
-        </p:blipFill>
-        <p:spPr>
-          <a:xfrm>
-            <a:off x="0" y="0"/>
-            <a:ext cx="12192000" cy="6858000"/>
-          </a:xfrm>
-          <a:prstGeom prst="rect">
-            <a:avLst/>
-          </a:prstGeom>
-        </p:spPr>
-      </p:pic>
-      <p:pic>
-        <p:nvPicPr>
-          <p:cNvPr id="3" name="Picture 2" descr="image.png"/>
-          <p:cNvPicPr>
-            <a:picLocks noChangeAspect="1"/>
-          </p:cNvPicPr>
-          <p:nvPr/>
-        </p:nvPicPr>
-        <p:blipFill>
-          <a:blip r:embed="rId3"/>
-          <a:stretch>
-            <a:fillRect/>
-          </a:stretch>
-        </p:blipFill>
-        <p:spPr>
-          <a:xfrm>
-            <a:off x="6381750" y="2047875"/>
-            <a:ext cx="5238750" cy="3810000"/>
-          </a:xfrm>
-          <a:prstGeom prst="rect">
-            <a:avLst/>
-          </a:prstGeom>
-        </p:spPr>
-      </p:pic>
-      <p:sp>
-        <p:nvSpPr>
-          <p:cNvPr id="4" name="TextBox 3"/>
-          <p:cNvSpPr txBox="1"/>
-          <p:nvPr/>
-        </p:nvSpPr>
-        <p:spPr>
-          <a:xfrm>
-            <a:off x="571500" y="2000250"/>
-            <a:ext cx="5500687" cy="323850"/>
-          </a:xfrm>
-          <a:prstGeom prst="rect">
-            <a:avLst/>
-          </a:prstGeom>
-          <a:noFill/>
-        </p:spPr>
-        <p:txBody>
-          <a:bodyPr wrap="square" lIns="0" tIns="0" rIns="0" bIns="0" anchor="t">
-            <a:spAutoFit/>
-          </a:bodyPr>
-          <a:lstStyle/>
-          <a:p>
-            <a:pPr algn="l"/>
-            <a:r>
-              <a:rPr sz="2250" b="1" i="0" u="none">
-                <a:solidFill>
-                  <a:srgbClr val="1E293B"/>
-                </a:solidFill>
-                <a:latin typeface="Times New Roman"/>
-              </a:rPr>
-              <a:t>Khó khăn hiện tại</a:t>
-            </a:r>
-          </a:p>
-        </p:txBody>
-      </p:sp>
-      <p:sp>
-        <p:nvSpPr>
-          <p:cNvPr id="5" name="TextBox 4"/>
-          <p:cNvSpPr txBox="1"/>
-          <p:nvPr/>
-        </p:nvSpPr>
-        <p:spPr>
-          <a:xfrm>
-            <a:off x="571500" y="4000500"/>
-            <a:ext cx="5500687" cy="323850"/>
-          </a:xfrm>
-          <a:prstGeom prst="rect">
-            <a:avLst/>
-          </a:prstGeom>
-          <a:noFill/>
-        </p:spPr>
-        <p:txBody>
-          <a:bodyPr wrap="square" lIns="0" tIns="0" rIns="0" bIns="0" anchor="t">
-            <a:spAutoFit/>
-          </a:bodyPr>
-          <a:lstStyle/>
-          <a:p>
-            <a:pPr algn="l"/>
-            <a:r>
-              <a:rPr sz="2250" b="1" i="0" u="none">
-                <a:solidFill>
-                  <a:srgbClr val="1E293B"/>
-                </a:solidFill>
-                <a:latin typeface="Times New Roman"/>
-              </a:rPr>
-              <a:t>Mục đích dự án</a:t>
-            </a:r>
-          </a:p>
-        </p:txBody>
-      </p:sp>
-      <p:sp>
-        <p:nvSpPr>
-          <p:cNvPr id="6" name="TextBox 5"/>
-          <p:cNvSpPr txBox="1"/>
-          <p:nvPr/>
-        </p:nvSpPr>
-        <p:spPr>
-          <a:xfrm>
-            <a:off x="809625" y="2476500"/>
-            <a:ext cx="5000625" cy="285750"/>
-          </a:xfrm>
-          <a:prstGeom prst="rect">
-            <a:avLst/>
-          </a:prstGeom>
-          <a:noFill/>
-        </p:spPr>
-        <p:txBody>
-          <a:bodyPr wrap="square" lIns="0" tIns="0" rIns="0" bIns="0" anchor="t">
-            <a:spAutoFit/>
-          </a:bodyPr>
-          <a:lstStyle/>
-          <a:p>
-            <a:pPr algn="l">
-              <a:lnSpc>
-                <a:spcPts val="2250"/>
-              </a:lnSpc>
-            </a:pPr>
-            <a:r>
-              <a:rPr sz="1500" b="0" i="0" u="none">
-                <a:solidFill>
-                  <a:srgbClr val="334155"/>
-                </a:solidFill>
-                <a:latin typeface="Times New Roman"/>
-              </a:rPr>
-              <a:t>Quản lý quy trình thủ công rải rác trên nhiều nền tảng.</a:t>
-            </a:r>
-          </a:p>
-        </p:txBody>
-      </p:sp>
-      <p:sp>
-        <p:nvSpPr>
-          <p:cNvPr id="7" name="TextBox 6"/>
-          <p:cNvSpPr txBox="1"/>
-          <p:nvPr/>
-        </p:nvSpPr>
-        <p:spPr>
-          <a:xfrm>
-            <a:off x="809625" y="2952750"/>
-            <a:ext cx="5000625" cy="285750"/>
-          </a:xfrm>
-          <a:prstGeom prst="rect">
-            <a:avLst/>
-          </a:prstGeom>
-          <a:noFill/>
-        </p:spPr>
-        <p:txBody>
-          <a:bodyPr wrap="square" lIns="0" tIns="0" rIns="0" bIns="0" anchor="t">
-            <a:spAutoFit/>
-          </a:bodyPr>
-          <a:lstStyle/>
-          <a:p>
-            <a:pPr algn="l">
-              <a:lnSpc>
-                <a:spcPts val="2250"/>
-              </a:lnSpc>
-            </a:pPr>
-            <a:r>
-              <a:rPr sz="1500" b="0" i="0" u="none">
-                <a:solidFill>
-                  <a:srgbClr val="334155"/>
-                </a:solidFill>
-                <a:latin typeface="Times New Roman"/>
-              </a:rPr>
-              <a:t>Sinh viên khó tìm kiếm đồng đội phù hợp năng lực.</a:t>
-            </a:r>
-          </a:p>
-        </p:txBody>
-      </p:sp>
-      <p:sp>
-        <p:nvSpPr>
-          <p:cNvPr id="8" name="TextBox 7"/>
-          <p:cNvSpPr txBox="1"/>
-          <p:nvPr/>
-        </p:nvSpPr>
-        <p:spPr>
-          <a:xfrm>
-            <a:off x="809625" y="3429000"/>
-            <a:ext cx="5000625" cy="285750"/>
-          </a:xfrm>
-          <a:prstGeom prst="rect">
-            <a:avLst/>
-          </a:prstGeom>
-          <a:noFill/>
-        </p:spPr>
-        <p:txBody>
-          <a:bodyPr wrap="square" lIns="0" tIns="0" rIns="0" bIns="0" anchor="t">
-            <a:spAutoFit/>
-          </a:bodyPr>
-          <a:lstStyle/>
-          <a:p>
-            <a:pPr algn="l">
-              <a:lnSpc>
-                <a:spcPts val="2250"/>
-              </a:lnSpc>
-            </a:pPr>
-            <a:r>
-              <a:rPr sz="1500" b="0" i="0" u="none">
-                <a:solidFill>
-                  <a:srgbClr val="334155"/>
-                </a:solidFill>
-                <a:latin typeface="Times New Roman"/>
-              </a:rPr>
-              <a:t>Sinh viên thiếu định hướng và ý tưởng làm đề tài.</a:t>
-            </a:r>
-          </a:p>
-        </p:txBody>
-      </p:sp>
-      <p:sp>
-        <p:nvSpPr>
-          <p:cNvPr id="9" name="TextBox 8"/>
-          <p:cNvSpPr txBox="1"/>
-          <p:nvPr/>
-        </p:nvSpPr>
-        <p:spPr>
-          <a:xfrm>
-            <a:off x="809625" y="4476750"/>
-            <a:ext cx="5000625" cy="285750"/>
-          </a:xfrm>
-          <a:prstGeom prst="rect">
-            <a:avLst/>
-          </a:prstGeom>
-          <a:noFill/>
-        </p:spPr>
-        <p:txBody>
-          <a:bodyPr wrap="square" lIns="0" tIns="0" rIns="0" bIns="0" anchor="t">
-            <a:spAutoFit/>
-          </a:bodyPr>
-          <a:lstStyle/>
-          <a:p>
-            <a:pPr algn="l">
-              <a:lnSpc>
-                <a:spcPts val="2250"/>
-              </a:lnSpc>
-            </a:pPr>
-            <a:r>
-              <a:rPr sz="1500" b="0" i="0" u="none">
-                <a:solidFill>
-                  <a:srgbClr val="334155"/>
-                </a:solidFill>
-                <a:latin typeface="Times New Roman"/>
-              </a:rPr>
-              <a:t>Tự động hóa quản lý đồ án và quy trình đăng ký nhóm.</a:t>
-            </a:r>
-          </a:p>
-        </p:txBody>
-      </p:sp>
-      <p:sp>
-        <p:nvSpPr>
-          <p:cNvPr id="10" name="TextBox 9"/>
-          <p:cNvSpPr txBox="1"/>
-          <p:nvPr/>
-        </p:nvSpPr>
-        <p:spPr>
-          <a:xfrm>
-            <a:off x="809625" y="4953000"/>
-            <a:ext cx="5000625" cy="285750"/>
-          </a:xfrm>
-          <a:prstGeom prst="rect">
-            <a:avLst/>
-          </a:prstGeom>
-          <a:noFill/>
-        </p:spPr>
-        <p:txBody>
-          <a:bodyPr wrap="square" lIns="0" tIns="0" rIns="0" bIns="0" anchor="t">
-            <a:spAutoFit/>
-          </a:bodyPr>
-          <a:lstStyle/>
-          <a:p>
-            <a:pPr algn="l">
-              <a:lnSpc>
-                <a:spcPts val="2250"/>
-              </a:lnSpc>
-            </a:pPr>
-            <a:r>
-              <a:rPr sz="1500" b="0" i="0" u="none">
-                <a:solidFill>
-                  <a:srgbClr val="334155"/>
-                </a:solidFill>
-                <a:latin typeface="Times New Roman"/>
-              </a:rPr>
-              <a:t>Nâng cao chất lượng tương tác giữa Sinh viên và Giảng viên.</a:t>
-            </a:r>
-          </a:p>
-        </p:txBody>
-      </p:sp>
-      <p:sp>
-        <p:nvSpPr>
-          <p:cNvPr id="11" name="TextBox 10"/>
-          <p:cNvSpPr txBox="1"/>
-          <p:nvPr/>
-        </p:nvSpPr>
-        <p:spPr>
-          <a:xfrm>
-            <a:off x="809625" y="5429250"/>
-            <a:ext cx="5000625" cy="266291"/>
-          </a:xfrm>
-          <a:prstGeom prst="rect">
-            <a:avLst/>
-          </a:prstGeom>
-          <a:noFill/>
-        </p:spPr>
-        <p:txBody>
-          <a:bodyPr wrap="square" lIns="0" tIns="0" rIns="0" bIns="0" anchor="t">
-            <a:spAutoFit/>
-          </a:bodyPr>
-          <a:lstStyle/>
-          <a:p>
-            <a:pPr algn="l">
-              <a:lnSpc>
-                <a:spcPts val="2250"/>
-              </a:lnSpc>
-            </a:pPr>
-            <a:r>
-              <a:rPr sz="1500" b="0" i="0" u="none" dirty="0" err="1">
-                <a:solidFill>
-                  <a:srgbClr val="334155"/>
-                </a:solidFill>
-                <a:latin typeface="Times New Roman"/>
-              </a:rPr>
-              <a:t>Tích</a:t>
-            </a:r>
-            <a:r>
-              <a:rPr sz="1500" b="0" i="0" u="none" dirty="0">
-                <a:solidFill>
-                  <a:srgbClr val="334155"/>
-                </a:solidFill>
-                <a:latin typeface="Times New Roman"/>
-              </a:rPr>
-              <a:t> </a:t>
-            </a:r>
-            <a:r>
-              <a:rPr sz="1500" b="0" i="0" u="none" dirty="0" err="1">
-                <a:solidFill>
-                  <a:srgbClr val="334155"/>
-                </a:solidFill>
-                <a:latin typeface="Times New Roman"/>
-              </a:rPr>
-              <a:t>hợp</a:t>
-            </a:r>
-            <a:r>
-              <a:rPr sz="1500" b="0" i="0" u="none" dirty="0">
-                <a:solidFill>
-                  <a:srgbClr val="334155"/>
-                </a:solidFill>
-                <a:latin typeface="Times New Roman"/>
-              </a:rPr>
-              <a:t> AI </a:t>
-            </a:r>
-            <a:r>
-              <a:rPr sz="1500" b="0" i="0" u="none" dirty="0" err="1">
-                <a:solidFill>
-                  <a:srgbClr val="334155"/>
-                </a:solidFill>
-                <a:latin typeface="Times New Roman"/>
-              </a:rPr>
-              <a:t>để</a:t>
-            </a:r>
-            <a:r>
-              <a:rPr sz="1500" b="0" i="0" u="none" dirty="0">
-                <a:solidFill>
-                  <a:srgbClr val="334155"/>
-                </a:solidFill>
-                <a:latin typeface="Times New Roman"/>
-              </a:rPr>
-              <a:t> </a:t>
-            </a:r>
-            <a:r>
-              <a:rPr sz="1500" b="0" i="0" u="none" dirty="0" err="1">
-                <a:solidFill>
-                  <a:srgbClr val="334155"/>
-                </a:solidFill>
-                <a:latin typeface="Times New Roman"/>
-              </a:rPr>
-              <a:t>tối</a:t>
-            </a:r>
-            <a:r>
-              <a:rPr sz="1500" b="0" i="0" u="none" dirty="0">
-                <a:solidFill>
-                  <a:srgbClr val="334155"/>
-                </a:solidFill>
-                <a:latin typeface="Times New Roman"/>
-              </a:rPr>
-              <a:t> </a:t>
-            </a:r>
-            <a:r>
-              <a:rPr sz="1500" b="0" i="0" u="none" dirty="0" err="1">
-                <a:solidFill>
-                  <a:srgbClr val="334155"/>
-                </a:solidFill>
-                <a:latin typeface="Times New Roman"/>
-              </a:rPr>
-              <a:t>ưu</a:t>
-            </a:r>
-            <a:r>
-              <a:rPr sz="1500" b="0" i="0" u="none" dirty="0">
-                <a:solidFill>
-                  <a:srgbClr val="334155"/>
-                </a:solidFill>
-                <a:latin typeface="Times New Roman"/>
-              </a:rPr>
-              <a:t> </a:t>
-            </a:r>
-            <a:r>
-              <a:rPr sz="1500" b="0" i="0" u="none" dirty="0" err="1">
-                <a:solidFill>
-                  <a:srgbClr val="334155"/>
-                </a:solidFill>
-                <a:latin typeface="Times New Roman"/>
-              </a:rPr>
-              <a:t>hóa</a:t>
-            </a:r>
-            <a:r>
-              <a:rPr sz="1500" b="0" i="0" u="none" dirty="0">
-                <a:solidFill>
-                  <a:srgbClr val="334155"/>
-                </a:solidFill>
-                <a:latin typeface="Times New Roman"/>
-              </a:rPr>
-              <a:t> </a:t>
-            </a:r>
-            <a:r>
-              <a:rPr sz="1500" b="0" i="0" u="none" dirty="0" err="1">
-                <a:solidFill>
-                  <a:srgbClr val="334155"/>
-                </a:solidFill>
-                <a:latin typeface="Times New Roman"/>
-              </a:rPr>
-              <a:t>việc</a:t>
-            </a:r>
-            <a:r>
-              <a:rPr sz="1500" b="0" i="0" u="none" dirty="0">
-                <a:solidFill>
-                  <a:srgbClr val="334155"/>
-                </a:solidFill>
-                <a:latin typeface="Times New Roman"/>
-              </a:rPr>
-              <a:t> </a:t>
-            </a:r>
-            <a:r>
-              <a:rPr sz="1500" b="0" i="0" u="none" dirty="0" err="1">
-                <a:solidFill>
-                  <a:srgbClr val="334155"/>
-                </a:solidFill>
-                <a:latin typeface="Times New Roman"/>
-              </a:rPr>
-              <a:t>hỗ</a:t>
-            </a:r>
-            <a:r>
-              <a:rPr sz="1500" b="0" i="0" u="none" dirty="0">
-                <a:solidFill>
-                  <a:srgbClr val="334155"/>
-                </a:solidFill>
-                <a:latin typeface="Times New Roman"/>
-              </a:rPr>
-              <a:t> </a:t>
-            </a:r>
-            <a:r>
-              <a:rPr sz="1500" b="0" i="0" u="none" dirty="0" err="1">
-                <a:solidFill>
-                  <a:srgbClr val="334155"/>
-                </a:solidFill>
-                <a:latin typeface="Times New Roman"/>
-              </a:rPr>
-              <a:t>trợ</a:t>
-            </a:r>
-            <a:r>
-              <a:rPr sz="1500" b="0" i="0" u="none" dirty="0">
-                <a:solidFill>
-                  <a:srgbClr val="334155"/>
-                </a:solidFill>
-                <a:latin typeface="Times New Roman"/>
-              </a:rPr>
-              <a:t> </a:t>
-            </a:r>
-            <a:r>
-              <a:rPr sz="1500" b="0" i="0" u="none" dirty="0" err="1">
-                <a:solidFill>
-                  <a:srgbClr val="334155"/>
-                </a:solidFill>
-                <a:latin typeface="Times New Roman"/>
-              </a:rPr>
-              <a:t>đề</a:t>
-            </a:r>
-            <a:r>
-              <a:rPr sz="1500" b="0" i="0" u="none" dirty="0">
-                <a:solidFill>
-                  <a:srgbClr val="334155"/>
-                </a:solidFill>
-                <a:latin typeface="Times New Roman"/>
-              </a:rPr>
-              <a:t> </a:t>
-            </a:r>
-            <a:r>
-              <a:rPr sz="1500" b="0" i="0" u="none" dirty="0" err="1">
-                <a:solidFill>
-                  <a:srgbClr val="334155"/>
-                </a:solidFill>
-                <a:latin typeface="Times New Roman"/>
-              </a:rPr>
-              <a:t>tài</a:t>
-            </a:r>
-            <a:r>
-              <a:rPr sz="1500" b="0" i="0" u="none" dirty="0">
-                <a:solidFill>
-                  <a:srgbClr val="334155"/>
-                </a:solidFill>
-                <a:latin typeface="Times New Roman"/>
-              </a:rPr>
-              <a:t>.</a:t>
-            </a:r>
-          </a:p>
-        </p:txBody>
-      </p:sp>
-      <p:pic>
-        <p:nvPicPr>
-          <p:cNvPr id="12" name="Picture 11" descr="image.png"/>
-          <p:cNvPicPr>
-            <a:picLocks noChangeAspect="1"/>
-          </p:cNvPicPr>
-          <p:nvPr/>
-        </p:nvPicPr>
-        <p:blipFill>
-          <a:blip r:embed="rId4"/>
-          <a:stretch>
-            <a:fillRect/>
-          </a:stretch>
-        </p:blipFill>
-        <p:spPr>
-          <a:xfrm>
-            <a:off x="6391275" y="2057400"/>
-            <a:ext cx="5219700" cy="3790950"/>
-          </a:xfrm>
-          <a:prstGeom prst="rect">
-            <a:avLst/>
-          </a:prstGeom>
-        </p:spPr>
-      </p:pic>
-      <p:sp>
-        <p:nvSpPr>
-          <p:cNvPr id="13" name="TextBox 12"/>
-          <p:cNvSpPr txBox="1"/>
-          <p:nvPr/>
-        </p:nvSpPr>
-        <p:spPr>
-          <a:xfrm>
-            <a:off x="571500" y="2457450"/>
-            <a:ext cx="66675" cy="314325"/>
-          </a:xfrm>
-          <a:prstGeom prst="rect">
-            <a:avLst/>
-          </a:prstGeom>
-          <a:noFill/>
-        </p:spPr>
-        <p:txBody>
-          <a:bodyPr wrap="square" lIns="0" tIns="0" rIns="0" bIns="0" anchor="t">
-            <a:spAutoFit/>
-          </a:bodyPr>
-          <a:lstStyle/>
-          <a:p>
-            <a:pPr algn="l">
-              <a:lnSpc>
-                <a:spcPts val="2475"/>
-              </a:lnSpc>
-            </a:pPr>
-            <a:r>
-              <a:rPr sz="1650" b="1" i="0" u="none">
-                <a:solidFill>
-                  <a:srgbClr val="005088"/>
-                </a:solidFill>
-                <a:latin typeface="Times New Roman"/>
-              </a:rPr>
-              <a:t>-</a:t>
-            </a:r>
-          </a:p>
-        </p:txBody>
-      </p:sp>
-      <p:sp>
-        <p:nvSpPr>
-          <p:cNvPr id="14" name="TextBox 13"/>
-          <p:cNvSpPr txBox="1"/>
-          <p:nvPr/>
-        </p:nvSpPr>
-        <p:spPr>
-          <a:xfrm>
-            <a:off x="571500" y="2933700"/>
-            <a:ext cx="66675" cy="314325"/>
-          </a:xfrm>
-          <a:prstGeom prst="rect">
-            <a:avLst/>
-          </a:prstGeom>
-          <a:noFill/>
-        </p:spPr>
-        <p:txBody>
-          <a:bodyPr wrap="square" lIns="0" tIns="0" rIns="0" bIns="0" anchor="t">
-            <a:spAutoFit/>
-          </a:bodyPr>
-          <a:lstStyle/>
-          <a:p>
-            <a:pPr algn="l">
-              <a:lnSpc>
-                <a:spcPts val="2475"/>
-              </a:lnSpc>
-            </a:pPr>
-            <a:r>
-              <a:rPr sz="1650" b="1" i="0" u="none">
-                <a:solidFill>
-                  <a:srgbClr val="005088"/>
-                </a:solidFill>
-                <a:latin typeface="Times New Roman"/>
-              </a:rPr>
-              <a:t>-</a:t>
-            </a:r>
-          </a:p>
-        </p:txBody>
-      </p:sp>
-      <p:sp>
-        <p:nvSpPr>
-          <p:cNvPr id="15" name="TextBox 14"/>
-          <p:cNvSpPr txBox="1"/>
-          <p:nvPr/>
-        </p:nvSpPr>
-        <p:spPr>
-          <a:xfrm>
-            <a:off x="571500" y="3409950"/>
-            <a:ext cx="66675" cy="314325"/>
-          </a:xfrm>
-          <a:prstGeom prst="rect">
-            <a:avLst/>
-          </a:prstGeom>
-          <a:noFill/>
-        </p:spPr>
-        <p:txBody>
-          <a:bodyPr wrap="square" lIns="0" tIns="0" rIns="0" bIns="0" anchor="t">
-            <a:spAutoFit/>
-          </a:bodyPr>
-          <a:lstStyle/>
-          <a:p>
-            <a:pPr algn="l">
-              <a:lnSpc>
-                <a:spcPts val="2475"/>
-              </a:lnSpc>
-            </a:pPr>
-            <a:r>
-              <a:rPr sz="1650" b="1" i="0" u="none">
-                <a:solidFill>
-                  <a:srgbClr val="005088"/>
-                </a:solidFill>
-                <a:latin typeface="Times New Roman"/>
-              </a:rPr>
-              <a:t>-</a:t>
-            </a:r>
-          </a:p>
-        </p:txBody>
-      </p:sp>
-      <p:sp>
-        <p:nvSpPr>
-          <p:cNvPr id="16" name="TextBox 15"/>
-          <p:cNvSpPr txBox="1"/>
-          <p:nvPr/>
-        </p:nvSpPr>
-        <p:spPr>
-          <a:xfrm>
-            <a:off x="571500" y="4457700"/>
-            <a:ext cx="66675" cy="314325"/>
-          </a:xfrm>
-          <a:prstGeom prst="rect">
-            <a:avLst/>
-          </a:prstGeom>
-          <a:noFill/>
-        </p:spPr>
-        <p:txBody>
-          <a:bodyPr wrap="square" lIns="0" tIns="0" rIns="0" bIns="0" anchor="t">
-            <a:spAutoFit/>
-          </a:bodyPr>
-          <a:lstStyle/>
-          <a:p>
-            <a:pPr algn="l">
-              <a:lnSpc>
-                <a:spcPts val="2475"/>
-              </a:lnSpc>
-            </a:pPr>
-            <a:r>
-              <a:rPr sz="1650" b="1" i="0" u="none">
-                <a:solidFill>
-                  <a:srgbClr val="005088"/>
-                </a:solidFill>
-                <a:latin typeface="Times New Roman"/>
-              </a:rPr>
-              <a:t>-</a:t>
-            </a:r>
-          </a:p>
-        </p:txBody>
-      </p:sp>
-      <p:sp>
-        <p:nvSpPr>
-          <p:cNvPr id="17" name="TextBox 16"/>
-          <p:cNvSpPr txBox="1"/>
-          <p:nvPr/>
-        </p:nvSpPr>
-        <p:spPr>
-          <a:xfrm>
-            <a:off x="571500" y="4933950"/>
-            <a:ext cx="66675" cy="314325"/>
-          </a:xfrm>
-          <a:prstGeom prst="rect">
-            <a:avLst/>
-          </a:prstGeom>
-          <a:noFill/>
-        </p:spPr>
-        <p:txBody>
-          <a:bodyPr wrap="square" lIns="0" tIns="0" rIns="0" bIns="0" anchor="t">
-            <a:spAutoFit/>
-          </a:bodyPr>
-          <a:lstStyle/>
-          <a:p>
-            <a:pPr algn="l">
-              <a:lnSpc>
-                <a:spcPts val="2475"/>
-              </a:lnSpc>
-            </a:pPr>
-            <a:r>
-              <a:rPr sz="1650" b="1" i="0" u="none">
-                <a:solidFill>
-                  <a:srgbClr val="005088"/>
-                </a:solidFill>
-                <a:latin typeface="Times New Roman"/>
-              </a:rPr>
-              <a:t>-</a:t>
-            </a:r>
-          </a:p>
-        </p:txBody>
-      </p:sp>
-      <p:sp>
-        <p:nvSpPr>
-          <p:cNvPr id="18" name="TextBox 17"/>
-          <p:cNvSpPr txBox="1"/>
-          <p:nvPr/>
-        </p:nvSpPr>
-        <p:spPr>
-          <a:xfrm>
-            <a:off x="571500" y="5410200"/>
-            <a:ext cx="66675" cy="314325"/>
-          </a:xfrm>
-          <a:prstGeom prst="rect">
-            <a:avLst/>
-          </a:prstGeom>
-          <a:noFill/>
-        </p:spPr>
-        <p:txBody>
-          <a:bodyPr wrap="square" lIns="0" tIns="0" rIns="0" bIns="0" anchor="t">
-            <a:spAutoFit/>
-          </a:bodyPr>
-          <a:lstStyle/>
-          <a:p>
-            <a:pPr algn="l">
-              <a:lnSpc>
-                <a:spcPts val="2475"/>
-              </a:lnSpc>
-            </a:pPr>
-            <a:r>
-              <a:rPr sz="1650" b="1" i="0" u="none">
-                <a:solidFill>
-                  <a:srgbClr val="005088"/>
-                </a:solidFill>
-                <a:latin typeface="Times New Roman"/>
-              </a:rPr>
-              <a:t>-</a:t>
-            </a:r>
-          </a:p>
-        </p:txBody>
-      </p:sp>
-      <p:sp>
-        <p:nvSpPr>
-          <p:cNvPr id="19" name="TextBox 18"/>
-          <p:cNvSpPr txBox="1"/>
-          <p:nvPr/>
-        </p:nvSpPr>
-        <p:spPr>
-          <a:xfrm>
-            <a:off x="571500" y="571500"/>
-            <a:ext cx="11601450" cy="523875"/>
-          </a:xfrm>
-          <a:prstGeom prst="rect">
-            <a:avLst/>
-          </a:prstGeom>
-          <a:noFill/>
-        </p:spPr>
-        <p:txBody>
-          <a:bodyPr wrap="square" lIns="0" tIns="0" rIns="0" bIns="0" anchor="t">
-            <a:spAutoFit/>
-          </a:bodyPr>
-          <a:lstStyle/>
-          <a:p>
-            <a:pPr algn="l"/>
-            <a:r>
-              <a:rPr sz="3450" b="1" i="0" u="none">
-                <a:solidFill>
-                  <a:srgbClr val="1E293B"/>
-                </a:solidFill>
-                <a:latin typeface="Times New Roman"/>
-              </a:rPr>
-              <a:t>Mục đích &amp; Lợi ích</a:t>
-            </a:r>
-          </a:p>
-        </p:txBody>
-      </p:sp>
-      <p:sp>
-        <p:nvSpPr>
-          <p:cNvPr id="20" name="Rectangle 19"/>
-          <p:cNvSpPr/>
-          <p:nvPr/>
-        </p:nvSpPr>
-        <p:spPr>
-          <a:xfrm>
-            <a:off x="571500" y="1219200"/>
-            <a:ext cx="11049000" cy="19050"/>
-          </a:xfrm>
-          <a:prstGeom prst="rect">
-            <a:avLst/>
-          </a:prstGeom>
-          <a:solidFill>
-            <a:srgbClr val="005088"/>
-          </a:solidFill>
-          <a:ln>
-            <a:noFill/>
-          </a:ln>
-          <a:effectLst/>
-        </p:spPr>
-        <p:style>
-          <a:lnRef idx="1">
-            <a:schemeClr val="accent1"/>
-          </a:lnRef>
-          <a:fillRef idx="3">
-            <a:schemeClr val="accent1"/>
-          </a:fillRef>
-          <a:effectRef idx="2">
-            <a:schemeClr val="accent1"/>
-          </a:effectRef>
-          <a:fontRef idx="minor">
-            <a:schemeClr val="lt1"/>
-          </a:fontRef>
-        </p:style>
-        <p:txBody>
-          <a:bodyPr rtlCol="0" anchor="ctr"/>
-          <a:lstStyle/>
-          <a:p>
-            <a:pPr algn="ctr"/>
-            <a:endParaRPr/>
-          </a:p>
-        </p:txBody>
-      </p:sp>
-    </p:spTree>
-  </p:cSld>
-  <p:clrMapOvr>
-    <a:masterClrMapping/>
-  </p:clrMapOvr>
-</p:sld>
-</file>
-
-<file path=ppt/slides/slide20.xml><?xml version="1.0" encoding="utf-8"?>
+<file path=ppt/slides/slide21.xml><?xml version="1.0" encoding="utf-8"?>
 <p:sld xmlns:a="http://schemas.openxmlformats.org/drawingml/2006/main" xmlns:r="http://schemas.openxmlformats.org/officeDocument/2006/relationships" xmlns:p="http://schemas.openxmlformats.org/presentationml/2006/main">
   <p:cSld>
     <p:spTree>
@@ -23155,7 +22547,7 @@
 </p:sld>
 </file>
 
-<file path=ppt/slides/slide21.xml><?xml version="1.0" encoding="utf-8"?>
+<file path=ppt/slides/slide22.xml><?xml version="1.0" encoding="utf-8"?>
 <p:sld xmlns:a="http://schemas.openxmlformats.org/drawingml/2006/main" xmlns:r="http://schemas.openxmlformats.org/officeDocument/2006/relationships" xmlns:p="http://schemas.openxmlformats.org/presentationml/2006/main">
   <p:cSld>
     <p:spTree>
@@ -31102,7 +30494,7 @@
 </p:sld>
 </file>
 
-<file path=ppt/slides/slide22.xml><?xml version="1.0" encoding="utf-8"?>
+<file path=ppt/slides/slide23.xml><?xml version="1.0" encoding="utf-8"?>
 <p:sld xmlns:a="http://schemas.openxmlformats.org/drawingml/2006/main" xmlns:r="http://schemas.openxmlformats.org/officeDocument/2006/relationships" xmlns:p="http://schemas.openxmlformats.org/presentationml/2006/main">
   <p:cSld>
     <p:bg>
@@ -31393,6 +30785,918 @@
 </file>
 
 <file path=ppt/slides/slide3.xml><?xml version="1.0" encoding="utf-8"?>
+<p:sld xmlns:a="http://schemas.openxmlformats.org/drawingml/2006/main" xmlns:r="http://schemas.openxmlformats.org/officeDocument/2006/relationships" xmlns:p="http://schemas.openxmlformats.org/presentationml/2006/main">
+  <p:cSld>
+    <p:bg>
+      <p:bgPr>
+        <a:solidFill>
+          <a:srgbClr val="FFFFFF"/>
+        </a:solidFill>
+        <a:effectLst/>
+      </p:bgPr>
+    </p:bg>
+    <p:spTree>
+      <p:nvGrpSpPr>
+        <p:cNvPr id="1" name=""/>
+        <p:cNvGrpSpPr/>
+        <p:nvPr/>
+      </p:nvGrpSpPr>
+      <p:grpSpPr>
+        <a:xfrm>
+          <a:off x="0" y="0"/>
+          <a:ext cx="0" cy="0"/>
+          <a:chOff x="0" y="0"/>
+          <a:chExt cx="0" cy="0"/>
+        </a:xfrm>
+      </p:grpSpPr>
+      <p:pic>
+        <p:nvPicPr>
+          <p:cNvPr id="2" name="Picture 1" descr="image.png"/>
+          <p:cNvPicPr>
+            <a:picLocks noChangeAspect="1"/>
+          </p:cNvPicPr>
+          <p:nvPr/>
+        </p:nvPicPr>
+        <p:blipFill>
+          <a:blip r:embed="rId2"/>
+          <a:stretch>
+            <a:fillRect/>
+          </a:stretch>
+        </p:blipFill>
+        <p:spPr>
+          <a:xfrm>
+            <a:off x="0" y="0"/>
+            <a:ext cx="12192000" cy="6858000"/>
+          </a:xfrm>
+          <a:prstGeom prst="rect">
+            <a:avLst/>
+          </a:prstGeom>
+        </p:spPr>
+      </p:pic>
+      <p:pic>
+        <p:nvPicPr>
+          <p:cNvPr id="3" name="Picture 2" descr="image.png"/>
+          <p:cNvPicPr>
+            <a:picLocks noChangeAspect="1"/>
+          </p:cNvPicPr>
+          <p:nvPr/>
+        </p:nvPicPr>
+        <p:blipFill>
+          <a:blip r:embed="rId3"/>
+          <a:stretch>
+            <a:fillRect/>
+          </a:stretch>
+        </p:blipFill>
+        <p:spPr>
+          <a:xfrm>
+            <a:off x="6381750" y="2047875"/>
+            <a:ext cx="5238750" cy="3810000"/>
+          </a:xfrm>
+          <a:prstGeom prst="rect">
+            <a:avLst/>
+          </a:prstGeom>
+        </p:spPr>
+      </p:pic>
+      <p:sp>
+        <p:nvSpPr>
+          <p:cNvPr id="4" name="TextBox 3"/>
+          <p:cNvSpPr txBox="1"/>
+          <p:nvPr/>
+        </p:nvSpPr>
+        <p:spPr>
+          <a:xfrm>
+            <a:off x="571500" y="2000250"/>
+            <a:ext cx="5500687" cy="323850"/>
+          </a:xfrm>
+          <a:prstGeom prst="rect">
+            <a:avLst/>
+          </a:prstGeom>
+          <a:noFill/>
+        </p:spPr>
+        <p:txBody>
+          <a:bodyPr wrap="square" lIns="0" tIns="0" rIns="0" bIns="0" anchor="t">
+            <a:spAutoFit/>
+          </a:bodyPr>
+          <a:lstStyle/>
+          <a:p>
+            <a:pPr algn="l"/>
+            <a:r>
+              <a:rPr sz="2250" b="1" i="0" u="none">
+                <a:solidFill>
+                  <a:srgbClr val="1E293B"/>
+                </a:solidFill>
+                <a:latin typeface="Times New Roman"/>
+              </a:rPr>
+              <a:t>Khó khăn hiện tại</a:t>
+            </a:r>
+          </a:p>
+        </p:txBody>
+      </p:sp>
+      <p:sp>
+        <p:nvSpPr>
+          <p:cNvPr id="5" name="TextBox 4"/>
+          <p:cNvSpPr txBox="1"/>
+          <p:nvPr/>
+        </p:nvSpPr>
+        <p:spPr>
+          <a:xfrm>
+            <a:off x="571500" y="4000500"/>
+            <a:ext cx="5500687" cy="323850"/>
+          </a:xfrm>
+          <a:prstGeom prst="rect">
+            <a:avLst/>
+          </a:prstGeom>
+          <a:noFill/>
+        </p:spPr>
+        <p:txBody>
+          <a:bodyPr wrap="square" lIns="0" tIns="0" rIns="0" bIns="0" anchor="t">
+            <a:spAutoFit/>
+          </a:bodyPr>
+          <a:lstStyle/>
+          <a:p>
+            <a:pPr algn="l"/>
+            <a:r>
+              <a:rPr sz="2250" b="1" i="0" u="none">
+                <a:solidFill>
+                  <a:srgbClr val="1E293B"/>
+                </a:solidFill>
+                <a:latin typeface="Times New Roman"/>
+              </a:rPr>
+              <a:t>Mục đích dự án</a:t>
+            </a:r>
+          </a:p>
+        </p:txBody>
+      </p:sp>
+      <p:sp>
+        <p:nvSpPr>
+          <p:cNvPr id="6" name="TextBox 5"/>
+          <p:cNvSpPr txBox="1"/>
+          <p:nvPr/>
+        </p:nvSpPr>
+        <p:spPr>
+          <a:xfrm>
+            <a:off x="809625" y="2476500"/>
+            <a:ext cx="5000625" cy="285750"/>
+          </a:xfrm>
+          <a:prstGeom prst="rect">
+            <a:avLst/>
+          </a:prstGeom>
+          <a:noFill/>
+        </p:spPr>
+        <p:txBody>
+          <a:bodyPr wrap="square" lIns="0" tIns="0" rIns="0" bIns="0" anchor="t">
+            <a:spAutoFit/>
+          </a:bodyPr>
+          <a:lstStyle/>
+          <a:p>
+            <a:pPr algn="l">
+              <a:lnSpc>
+                <a:spcPts val="2250"/>
+              </a:lnSpc>
+            </a:pPr>
+            <a:r>
+              <a:rPr sz="1500" b="0" i="0" u="none">
+                <a:solidFill>
+                  <a:srgbClr val="334155"/>
+                </a:solidFill>
+                <a:latin typeface="Times New Roman"/>
+              </a:rPr>
+              <a:t>Quản lý quy trình thủ công rải rác trên nhiều nền tảng.</a:t>
+            </a:r>
+          </a:p>
+        </p:txBody>
+      </p:sp>
+      <p:sp>
+        <p:nvSpPr>
+          <p:cNvPr id="7" name="TextBox 6"/>
+          <p:cNvSpPr txBox="1"/>
+          <p:nvPr/>
+        </p:nvSpPr>
+        <p:spPr>
+          <a:xfrm>
+            <a:off x="809625" y="2952750"/>
+            <a:ext cx="5000625" cy="285750"/>
+          </a:xfrm>
+          <a:prstGeom prst="rect">
+            <a:avLst/>
+          </a:prstGeom>
+          <a:noFill/>
+        </p:spPr>
+        <p:txBody>
+          <a:bodyPr wrap="square" lIns="0" tIns="0" rIns="0" bIns="0" anchor="t">
+            <a:spAutoFit/>
+          </a:bodyPr>
+          <a:lstStyle/>
+          <a:p>
+            <a:pPr algn="l">
+              <a:lnSpc>
+                <a:spcPts val="2250"/>
+              </a:lnSpc>
+            </a:pPr>
+            <a:r>
+              <a:rPr sz="1500" b="0" i="0" u="none">
+                <a:solidFill>
+                  <a:srgbClr val="334155"/>
+                </a:solidFill>
+                <a:latin typeface="Times New Roman"/>
+              </a:rPr>
+              <a:t>Sinh viên khó tìm kiếm đồng đội phù hợp năng lực.</a:t>
+            </a:r>
+          </a:p>
+        </p:txBody>
+      </p:sp>
+      <p:sp>
+        <p:nvSpPr>
+          <p:cNvPr id="8" name="TextBox 7"/>
+          <p:cNvSpPr txBox="1"/>
+          <p:nvPr/>
+        </p:nvSpPr>
+        <p:spPr>
+          <a:xfrm>
+            <a:off x="809625" y="3429000"/>
+            <a:ext cx="5000625" cy="285750"/>
+          </a:xfrm>
+          <a:prstGeom prst="rect">
+            <a:avLst/>
+          </a:prstGeom>
+          <a:noFill/>
+        </p:spPr>
+        <p:txBody>
+          <a:bodyPr wrap="square" lIns="0" tIns="0" rIns="0" bIns="0" anchor="t">
+            <a:spAutoFit/>
+          </a:bodyPr>
+          <a:lstStyle/>
+          <a:p>
+            <a:pPr algn="l">
+              <a:lnSpc>
+                <a:spcPts val="2250"/>
+              </a:lnSpc>
+            </a:pPr>
+            <a:r>
+              <a:rPr sz="1500" b="0" i="0" u="none">
+                <a:solidFill>
+                  <a:srgbClr val="334155"/>
+                </a:solidFill>
+                <a:latin typeface="Times New Roman"/>
+              </a:rPr>
+              <a:t>Sinh viên thiếu định hướng và ý tưởng làm đề tài.</a:t>
+            </a:r>
+          </a:p>
+        </p:txBody>
+      </p:sp>
+      <p:sp>
+        <p:nvSpPr>
+          <p:cNvPr id="9" name="TextBox 8"/>
+          <p:cNvSpPr txBox="1"/>
+          <p:nvPr/>
+        </p:nvSpPr>
+        <p:spPr>
+          <a:xfrm>
+            <a:off x="809625" y="4476750"/>
+            <a:ext cx="5000625" cy="285750"/>
+          </a:xfrm>
+          <a:prstGeom prst="rect">
+            <a:avLst/>
+          </a:prstGeom>
+          <a:noFill/>
+        </p:spPr>
+        <p:txBody>
+          <a:bodyPr wrap="square" lIns="0" tIns="0" rIns="0" bIns="0" anchor="t">
+            <a:spAutoFit/>
+          </a:bodyPr>
+          <a:lstStyle/>
+          <a:p>
+            <a:pPr algn="l">
+              <a:lnSpc>
+                <a:spcPts val="2250"/>
+              </a:lnSpc>
+            </a:pPr>
+            <a:r>
+              <a:rPr sz="1500" b="0" i="0" u="none">
+                <a:solidFill>
+                  <a:srgbClr val="334155"/>
+                </a:solidFill>
+                <a:latin typeface="Times New Roman"/>
+              </a:rPr>
+              <a:t>Tự động hóa quản lý đồ án và quy trình đăng ký nhóm.</a:t>
+            </a:r>
+          </a:p>
+        </p:txBody>
+      </p:sp>
+      <p:sp>
+        <p:nvSpPr>
+          <p:cNvPr id="10" name="TextBox 9"/>
+          <p:cNvSpPr txBox="1"/>
+          <p:nvPr/>
+        </p:nvSpPr>
+        <p:spPr>
+          <a:xfrm>
+            <a:off x="809625" y="4953000"/>
+            <a:ext cx="5000625" cy="285750"/>
+          </a:xfrm>
+          <a:prstGeom prst="rect">
+            <a:avLst/>
+          </a:prstGeom>
+          <a:noFill/>
+        </p:spPr>
+        <p:txBody>
+          <a:bodyPr wrap="square" lIns="0" tIns="0" rIns="0" bIns="0" anchor="t">
+            <a:spAutoFit/>
+          </a:bodyPr>
+          <a:lstStyle/>
+          <a:p>
+            <a:pPr algn="l">
+              <a:lnSpc>
+                <a:spcPts val="2250"/>
+              </a:lnSpc>
+            </a:pPr>
+            <a:r>
+              <a:rPr sz="1500" b="0" i="0" u="none">
+                <a:solidFill>
+                  <a:srgbClr val="334155"/>
+                </a:solidFill>
+                <a:latin typeface="Times New Roman"/>
+              </a:rPr>
+              <a:t>Nâng cao chất lượng tương tác giữa Sinh viên và Giảng viên.</a:t>
+            </a:r>
+          </a:p>
+        </p:txBody>
+      </p:sp>
+      <p:sp>
+        <p:nvSpPr>
+          <p:cNvPr id="11" name="TextBox 10"/>
+          <p:cNvSpPr txBox="1"/>
+          <p:nvPr/>
+        </p:nvSpPr>
+        <p:spPr>
+          <a:xfrm>
+            <a:off x="809625" y="5429250"/>
+            <a:ext cx="5000625" cy="266291"/>
+          </a:xfrm>
+          <a:prstGeom prst="rect">
+            <a:avLst/>
+          </a:prstGeom>
+          <a:noFill/>
+        </p:spPr>
+        <p:txBody>
+          <a:bodyPr wrap="square" lIns="0" tIns="0" rIns="0" bIns="0" anchor="t">
+            <a:spAutoFit/>
+          </a:bodyPr>
+          <a:lstStyle/>
+          <a:p>
+            <a:pPr algn="l">
+              <a:lnSpc>
+                <a:spcPts val="2250"/>
+              </a:lnSpc>
+            </a:pPr>
+            <a:r>
+              <a:rPr sz="1500" b="0" i="0" u="none" dirty="0" err="1">
+                <a:solidFill>
+                  <a:srgbClr val="334155"/>
+                </a:solidFill>
+                <a:latin typeface="Times New Roman"/>
+              </a:rPr>
+              <a:t>Tích</a:t>
+            </a:r>
+            <a:r>
+              <a:rPr sz="1500" b="0" i="0" u="none" dirty="0">
+                <a:solidFill>
+                  <a:srgbClr val="334155"/>
+                </a:solidFill>
+                <a:latin typeface="Times New Roman"/>
+              </a:rPr>
+              <a:t> </a:t>
+            </a:r>
+            <a:r>
+              <a:rPr sz="1500" b="0" i="0" u="none" dirty="0" err="1">
+                <a:solidFill>
+                  <a:srgbClr val="334155"/>
+                </a:solidFill>
+                <a:latin typeface="Times New Roman"/>
+              </a:rPr>
+              <a:t>hợp</a:t>
+            </a:r>
+            <a:r>
+              <a:rPr sz="1500" b="0" i="0" u="none" dirty="0">
+                <a:solidFill>
+                  <a:srgbClr val="334155"/>
+                </a:solidFill>
+                <a:latin typeface="Times New Roman"/>
+              </a:rPr>
+              <a:t> AI </a:t>
+            </a:r>
+            <a:r>
+              <a:rPr sz="1500" b="0" i="0" u="none" dirty="0" err="1">
+                <a:solidFill>
+                  <a:srgbClr val="334155"/>
+                </a:solidFill>
+                <a:latin typeface="Times New Roman"/>
+              </a:rPr>
+              <a:t>để</a:t>
+            </a:r>
+            <a:r>
+              <a:rPr sz="1500" b="0" i="0" u="none" dirty="0">
+                <a:solidFill>
+                  <a:srgbClr val="334155"/>
+                </a:solidFill>
+                <a:latin typeface="Times New Roman"/>
+              </a:rPr>
+              <a:t> </a:t>
+            </a:r>
+            <a:r>
+              <a:rPr sz="1500" b="0" i="0" u="none" dirty="0" err="1">
+                <a:solidFill>
+                  <a:srgbClr val="334155"/>
+                </a:solidFill>
+                <a:latin typeface="Times New Roman"/>
+              </a:rPr>
+              <a:t>tối</a:t>
+            </a:r>
+            <a:r>
+              <a:rPr sz="1500" b="0" i="0" u="none" dirty="0">
+                <a:solidFill>
+                  <a:srgbClr val="334155"/>
+                </a:solidFill>
+                <a:latin typeface="Times New Roman"/>
+              </a:rPr>
+              <a:t> </a:t>
+            </a:r>
+            <a:r>
+              <a:rPr sz="1500" b="0" i="0" u="none" dirty="0" err="1">
+                <a:solidFill>
+                  <a:srgbClr val="334155"/>
+                </a:solidFill>
+                <a:latin typeface="Times New Roman"/>
+              </a:rPr>
+              <a:t>ưu</a:t>
+            </a:r>
+            <a:r>
+              <a:rPr sz="1500" b="0" i="0" u="none" dirty="0">
+                <a:solidFill>
+                  <a:srgbClr val="334155"/>
+                </a:solidFill>
+                <a:latin typeface="Times New Roman"/>
+              </a:rPr>
+              <a:t> </a:t>
+            </a:r>
+            <a:r>
+              <a:rPr sz="1500" b="0" i="0" u="none" dirty="0" err="1">
+                <a:solidFill>
+                  <a:srgbClr val="334155"/>
+                </a:solidFill>
+                <a:latin typeface="Times New Roman"/>
+              </a:rPr>
+              <a:t>hóa</a:t>
+            </a:r>
+            <a:r>
+              <a:rPr sz="1500" b="0" i="0" u="none" dirty="0">
+                <a:solidFill>
+                  <a:srgbClr val="334155"/>
+                </a:solidFill>
+                <a:latin typeface="Times New Roman"/>
+              </a:rPr>
+              <a:t> </a:t>
+            </a:r>
+            <a:r>
+              <a:rPr sz="1500" b="0" i="0" u="none" dirty="0" err="1">
+                <a:solidFill>
+                  <a:srgbClr val="334155"/>
+                </a:solidFill>
+                <a:latin typeface="Times New Roman"/>
+              </a:rPr>
+              <a:t>việc</a:t>
+            </a:r>
+            <a:r>
+              <a:rPr sz="1500" b="0" i="0" u="none" dirty="0">
+                <a:solidFill>
+                  <a:srgbClr val="334155"/>
+                </a:solidFill>
+                <a:latin typeface="Times New Roman"/>
+              </a:rPr>
+              <a:t> </a:t>
+            </a:r>
+            <a:r>
+              <a:rPr sz="1500" b="0" i="0" u="none" dirty="0" err="1">
+                <a:solidFill>
+                  <a:srgbClr val="334155"/>
+                </a:solidFill>
+                <a:latin typeface="Times New Roman"/>
+              </a:rPr>
+              <a:t>hỗ</a:t>
+            </a:r>
+            <a:r>
+              <a:rPr sz="1500" b="0" i="0" u="none" dirty="0">
+                <a:solidFill>
+                  <a:srgbClr val="334155"/>
+                </a:solidFill>
+                <a:latin typeface="Times New Roman"/>
+              </a:rPr>
+              <a:t> </a:t>
+            </a:r>
+            <a:r>
+              <a:rPr sz="1500" b="0" i="0" u="none" dirty="0" err="1">
+                <a:solidFill>
+                  <a:srgbClr val="334155"/>
+                </a:solidFill>
+                <a:latin typeface="Times New Roman"/>
+              </a:rPr>
+              <a:t>trợ</a:t>
+            </a:r>
+            <a:r>
+              <a:rPr sz="1500" b="0" i="0" u="none" dirty="0">
+                <a:solidFill>
+                  <a:srgbClr val="334155"/>
+                </a:solidFill>
+                <a:latin typeface="Times New Roman"/>
+              </a:rPr>
+              <a:t> </a:t>
+            </a:r>
+            <a:r>
+              <a:rPr sz="1500" b="0" i="0" u="none" dirty="0" err="1">
+                <a:solidFill>
+                  <a:srgbClr val="334155"/>
+                </a:solidFill>
+                <a:latin typeface="Times New Roman"/>
+              </a:rPr>
+              <a:t>đề</a:t>
+            </a:r>
+            <a:r>
+              <a:rPr sz="1500" b="0" i="0" u="none" dirty="0">
+                <a:solidFill>
+                  <a:srgbClr val="334155"/>
+                </a:solidFill>
+                <a:latin typeface="Times New Roman"/>
+              </a:rPr>
+              <a:t> </a:t>
+            </a:r>
+            <a:r>
+              <a:rPr sz="1500" b="0" i="0" u="none" dirty="0" err="1">
+                <a:solidFill>
+                  <a:srgbClr val="334155"/>
+                </a:solidFill>
+                <a:latin typeface="Times New Roman"/>
+              </a:rPr>
+              <a:t>tài</a:t>
+            </a:r>
+            <a:r>
+              <a:rPr sz="1500" b="0" i="0" u="none" dirty="0">
+                <a:solidFill>
+                  <a:srgbClr val="334155"/>
+                </a:solidFill>
+                <a:latin typeface="Times New Roman"/>
+              </a:rPr>
+              <a:t>.</a:t>
+            </a:r>
+          </a:p>
+        </p:txBody>
+      </p:sp>
+      <p:pic>
+        <p:nvPicPr>
+          <p:cNvPr id="12" name="Picture 11" descr="image.png"/>
+          <p:cNvPicPr>
+            <a:picLocks noChangeAspect="1"/>
+          </p:cNvPicPr>
+          <p:nvPr/>
+        </p:nvPicPr>
+        <p:blipFill>
+          <a:blip r:embed="rId4"/>
+          <a:stretch>
+            <a:fillRect/>
+          </a:stretch>
+        </p:blipFill>
+        <p:spPr>
+          <a:xfrm>
+            <a:off x="6391275" y="2057400"/>
+            <a:ext cx="5219700" cy="3790950"/>
+          </a:xfrm>
+          <a:prstGeom prst="rect">
+            <a:avLst/>
+          </a:prstGeom>
+        </p:spPr>
+      </p:pic>
+      <p:sp>
+        <p:nvSpPr>
+          <p:cNvPr id="13" name="TextBox 12"/>
+          <p:cNvSpPr txBox="1"/>
+          <p:nvPr/>
+        </p:nvSpPr>
+        <p:spPr>
+          <a:xfrm>
+            <a:off x="571500" y="2457450"/>
+            <a:ext cx="66675" cy="314325"/>
+          </a:xfrm>
+          <a:prstGeom prst="rect">
+            <a:avLst/>
+          </a:prstGeom>
+          <a:noFill/>
+        </p:spPr>
+        <p:txBody>
+          <a:bodyPr wrap="square" lIns="0" tIns="0" rIns="0" bIns="0" anchor="t">
+            <a:spAutoFit/>
+          </a:bodyPr>
+          <a:lstStyle/>
+          <a:p>
+            <a:pPr algn="l">
+              <a:lnSpc>
+                <a:spcPts val="2475"/>
+              </a:lnSpc>
+            </a:pPr>
+            <a:r>
+              <a:rPr sz="1650" b="1" i="0" u="none">
+                <a:solidFill>
+                  <a:srgbClr val="005088"/>
+                </a:solidFill>
+                <a:latin typeface="Times New Roman"/>
+              </a:rPr>
+              <a:t>-</a:t>
+            </a:r>
+          </a:p>
+        </p:txBody>
+      </p:sp>
+      <p:sp>
+        <p:nvSpPr>
+          <p:cNvPr id="14" name="TextBox 13"/>
+          <p:cNvSpPr txBox="1"/>
+          <p:nvPr/>
+        </p:nvSpPr>
+        <p:spPr>
+          <a:xfrm>
+            <a:off x="571500" y="2933700"/>
+            <a:ext cx="66675" cy="314325"/>
+          </a:xfrm>
+          <a:prstGeom prst="rect">
+            <a:avLst/>
+          </a:prstGeom>
+          <a:noFill/>
+        </p:spPr>
+        <p:txBody>
+          <a:bodyPr wrap="square" lIns="0" tIns="0" rIns="0" bIns="0" anchor="t">
+            <a:spAutoFit/>
+          </a:bodyPr>
+          <a:lstStyle/>
+          <a:p>
+            <a:pPr algn="l">
+              <a:lnSpc>
+                <a:spcPts val="2475"/>
+              </a:lnSpc>
+            </a:pPr>
+            <a:r>
+              <a:rPr sz="1650" b="1" i="0" u="none">
+                <a:solidFill>
+                  <a:srgbClr val="005088"/>
+                </a:solidFill>
+                <a:latin typeface="Times New Roman"/>
+              </a:rPr>
+              <a:t>-</a:t>
+            </a:r>
+          </a:p>
+        </p:txBody>
+      </p:sp>
+      <p:sp>
+        <p:nvSpPr>
+          <p:cNvPr id="15" name="TextBox 14"/>
+          <p:cNvSpPr txBox="1"/>
+          <p:nvPr/>
+        </p:nvSpPr>
+        <p:spPr>
+          <a:xfrm>
+            <a:off x="571500" y="3409950"/>
+            <a:ext cx="66675" cy="314325"/>
+          </a:xfrm>
+          <a:prstGeom prst="rect">
+            <a:avLst/>
+          </a:prstGeom>
+          <a:noFill/>
+        </p:spPr>
+        <p:txBody>
+          <a:bodyPr wrap="square" lIns="0" tIns="0" rIns="0" bIns="0" anchor="t">
+            <a:spAutoFit/>
+          </a:bodyPr>
+          <a:lstStyle/>
+          <a:p>
+            <a:pPr algn="l">
+              <a:lnSpc>
+                <a:spcPts val="2475"/>
+              </a:lnSpc>
+            </a:pPr>
+            <a:r>
+              <a:rPr sz="1650" b="1" i="0" u="none">
+                <a:solidFill>
+                  <a:srgbClr val="005088"/>
+                </a:solidFill>
+                <a:latin typeface="Times New Roman"/>
+              </a:rPr>
+              <a:t>-</a:t>
+            </a:r>
+          </a:p>
+        </p:txBody>
+      </p:sp>
+      <p:sp>
+        <p:nvSpPr>
+          <p:cNvPr id="16" name="TextBox 15"/>
+          <p:cNvSpPr txBox="1"/>
+          <p:nvPr/>
+        </p:nvSpPr>
+        <p:spPr>
+          <a:xfrm>
+            <a:off x="571500" y="4457700"/>
+            <a:ext cx="66675" cy="314325"/>
+          </a:xfrm>
+          <a:prstGeom prst="rect">
+            <a:avLst/>
+          </a:prstGeom>
+          <a:noFill/>
+        </p:spPr>
+        <p:txBody>
+          <a:bodyPr wrap="square" lIns="0" tIns="0" rIns="0" bIns="0" anchor="t">
+            <a:spAutoFit/>
+          </a:bodyPr>
+          <a:lstStyle/>
+          <a:p>
+            <a:pPr algn="l">
+              <a:lnSpc>
+                <a:spcPts val="2475"/>
+              </a:lnSpc>
+            </a:pPr>
+            <a:r>
+              <a:rPr sz="1650" b="1" i="0" u="none">
+                <a:solidFill>
+                  <a:srgbClr val="005088"/>
+                </a:solidFill>
+                <a:latin typeface="Times New Roman"/>
+              </a:rPr>
+              <a:t>-</a:t>
+            </a:r>
+          </a:p>
+        </p:txBody>
+      </p:sp>
+      <p:sp>
+        <p:nvSpPr>
+          <p:cNvPr id="17" name="TextBox 16"/>
+          <p:cNvSpPr txBox="1"/>
+          <p:nvPr/>
+        </p:nvSpPr>
+        <p:spPr>
+          <a:xfrm>
+            <a:off x="571500" y="4933950"/>
+            <a:ext cx="66675" cy="314325"/>
+          </a:xfrm>
+          <a:prstGeom prst="rect">
+            <a:avLst/>
+          </a:prstGeom>
+          <a:noFill/>
+        </p:spPr>
+        <p:txBody>
+          <a:bodyPr wrap="square" lIns="0" tIns="0" rIns="0" bIns="0" anchor="t">
+            <a:spAutoFit/>
+          </a:bodyPr>
+          <a:lstStyle/>
+          <a:p>
+            <a:pPr algn="l">
+              <a:lnSpc>
+                <a:spcPts val="2475"/>
+              </a:lnSpc>
+            </a:pPr>
+            <a:r>
+              <a:rPr sz="1650" b="1" i="0" u="none">
+                <a:solidFill>
+                  <a:srgbClr val="005088"/>
+                </a:solidFill>
+                <a:latin typeface="Times New Roman"/>
+              </a:rPr>
+              <a:t>-</a:t>
+            </a:r>
+          </a:p>
+        </p:txBody>
+      </p:sp>
+      <p:sp>
+        <p:nvSpPr>
+          <p:cNvPr id="18" name="TextBox 17"/>
+          <p:cNvSpPr txBox="1"/>
+          <p:nvPr/>
+        </p:nvSpPr>
+        <p:spPr>
+          <a:xfrm>
+            <a:off x="571500" y="5410200"/>
+            <a:ext cx="66675" cy="314325"/>
+          </a:xfrm>
+          <a:prstGeom prst="rect">
+            <a:avLst/>
+          </a:prstGeom>
+          <a:noFill/>
+        </p:spPr>
+        <p:txBody>
+          <a:bodyPr wrap="square" lIns="0" tIns="0" rIns="0" bIns="0" anchor="t">
+            <a:spAutoFit/>
+          </a:bodyPr>
+          <a:lstStyle/>
+          <a:p>
+            <a:pPr algn="l">
+              <a:lnSpc>
+                <a:spcPts val="2475"/>
+              </a:lnSpc>
+            </a:pPr>
+            <a:r>
+              <a:rPr sz="1650" b="1" i="0" u="none">
+                <a:solidFill>
+                  <a:srgbClr val="005088"/>
+                </a:solidFill>
+                <a:latin typeface="Times New Roman"/>
+              </a:rPr>
+              <a:t>-</a:t>
+            </a:r>
+          </a:p>
+        </p:txBody>
+      </p:sp>
+      <p:sp>
+        <p:nvSpPr>
+          <p:cNvPr id="19" name="TextBox 18"/>
+          <p:cNvSpPr txBox="1"/>
+          <p:nvPr/>
+        </p:nvSpPr>
+        <p:spPr>
+          <a:xfrm>
+            <a:off x="571500" y="571500"/>
+            <a:ext cx="11601450" cy="523875"/>
+          </a:xfrm>
+          <a:prstGeom prst="rect">
+            <a:avLst/>
+          </a:prstGeom>
+          <a:noFill/>
+        </p:spPr>
+        <p:txBody>
+          <a:bodyPr wrap="square" lIns="0" tIns="0" rIns="0" bIns="0" anchor="t">
+            <a:spAutoFit/>
+          </a:bodyPr>
+          <a:lstStyle/>
+          <a:p>
+            <a:pPr algn="l"/>
+            <a:r>
+              <a:rPr sz="3450" b="1" i="0" u="none">
+                <a:solidFill>
+                  <a:srgbClr val="1E293B"/>
+                </a:solidFill>
+                <a:latin typeface="Times New Roman"/>
+              </a:rPr>
+              <a:t>Mục đích &amp; Lợi ích</a:t>
+            </a:r>
+          </a:p>
+        </p:txBody>
+      </p:sp>
+      <p:sp>
+        <p:nvSpPr>
+          <p:cNvPr id="20" name="Rectangle 19"/>
+          <p:cNvSpPr/>
+          <p:nvPr/>
+        </p:nvSpPr>
+        <p:spPr>
+          <a:xfrm>
+            <a:off x="571500" y="1219200"/>
+            <a:ext cx="11049000" cy="19050"/>
+          </a:xfrm>
+          <a:prstGeom prst="rect">
+            <a:avLst/>
+          </a:prstGeom>
+          <a:solidFill>
+            <a:srgbClr val="005088"/>
+          </a:solidFill>
+          <a:ln>
+            <a:noFill/>
+          </a:ln>
+          <a:effectLst/>
+        </p:spPr>
+        <p:style>
+          <a:lnRef idx="1">
+            <a:schemeClr val="accent1"/>
+          </a:lnRef>
+          <a:fillRef idx="3">
+            <a:schemeClr val="accent1"/>
+          </a:fillRef>
+          <a:effectRef idx="2">
+            <a:schemeClr val="accent1"/>
+          </a:effectRef>
+          <a:fontRef idx="minor">
+            <a:schemeClr val="lt1"/>
+          </a:fontRef>
+        </p:style>
+        <p:txBody>
+          <a:bodyPr rtlCol="0" anchor="ctr"/>
+          <a:lstStyle/>
+          <a:p>
+            <a:pPr algn="ctr"/>
+            <a:endParaRPr/>
+          </a:p>
+        </p:txBody>
+      </p:sp>
+    </p:spTree>
+  </p:cSld>
+  <p:clrMapOvr>
+    <a:masterClrMapping/>
+  </p:clrMapOvr>
+</p:sld>
+</file>
+
+<file path=ppt/slides/slide4.xml><?xml version="1.0" encoding="utf-8"?>
 <p:sld xmlns:a="http://schemas.openxmlformats.org/drawingml/2006/main" xmlns:r="http://schemas.openxmlformats.org/officeDocument/2006/relationships" xmlns:p="http://schemas.openxmlformats.org/presentationml/2006/main">
   <p:cSld>
     <p:bg>
@@ -31827,16 +32131,169 @@
               </a:lnSpc>
             </a:pPr>
             <a:r>
-              <a:rPr sz="1500" b="0" i="0" u="none">
+              <a:rPr sz="1500" b="0" i="0" u="none" dirty="0" err="1">
                 <a:solidFill>
                   <a:srgbClr val="334155"/>
                 </a:solidFill>
                 <a:latin typeface="Times New Roman"/>
               </a:rPr>
-              <a:t>Xây dựng các dịch vụ phía máy chủ bằng </a:t>
-            </a:r>
-            <a:r>
-              <a:rPr sz="1500" b="1" i="0" u="none">
+              <a:t>Xây</a:t>
+            </a:r>
+            <a:r>
+              <a:rPr sz="1500" b="0" i="0" u="none" dirty="0">
+                <a:solidFill>
+                  <a:srgbClr val="334155"/>
+                </a:solidFill>
+                <a:latin typeface="Times New Roman"/>
+              </a:rPr>
+              <a:t> </a:t>
+            </a:r>
+            <a:r>
+              <a:rPr sz="1500" b="0" i="0" u="none" dirty="0" err="1">
+                <a:solidFill>
+                  <a:srgbClr val="334155"/>
+                </a:solidFill>
+                <a:latin typeface="Times New Roman"/>
+              </a:rPr>
+              <a:t>dựng</a:t>
+            </a:r>
+            <a:r>
+              <a:rPr sz="1500" b="0" i="0" u="none" dirty="0">
+                <a:solidFill>
+                  <a:srgbClr val="334155"/>
+                </a:solidFill>
+                <a:latin typeface="Times New Roman"/>
+              </a:rPr>
+              <a:t> </a:t>
+            </a:r>
+            <a:r>
+              <a:rPr sz="1500" b="0" i="0" u="none" dirty="0" err="1">
+                <a:solidFill>
+                  <a:srgbClr val="334155"/>
+                </a:solidFill>
+                <a:latin typeface="Times New Roman"/>
+              </a:rPr>
+              <a:t>các</a:t>
+            </a:r>
+            <a:r>
+              <a:rPr sz="1500" b="0" i="0" u="none" dirty="0">
+                <a:solidFill>
+                  <a:srgbClr val="334155"/>
+                </a:solidFill>
+                <a:latin typeface="Times New Roman"/>
+              </a:rPr>
+              <a:t> </a:t>
+            </a:r>
+            <a:r>
+              <a:rPr sz="1500" b="0" i="0" u="none" dirty="0" err="1">
+                <a:solidFill>
+                  <a:srgbClr val="334155"/>
+                </a:solidFill>
+                <a:latin typeface="Times New Roman"/>
+              </a:rPr>
+              <a:t>dịch</a:t>
+            </a:r>
+            <a:r>
+              <a:rPr sz="1500" b="0" i="0" u="none" dirty="0">
+                <a:solidFill>
+                  <a:srgbClr val="334155"/>
+                </a:solidFill>
+                <a:latin typeface="Times New Roman"/>
+              </a:rPr>
+              <a:t> </a:t>
+            </a:r>
+            <a:r>
+              <a:rPr sz="1500" b="0" i="0" u="none" dirty="0" err="1">
+                <a:solidFill>
+                  <a:srgbClr val="334155"/>
+                </a:solidFill>
+                <a:latin typeface="Times New Roman"/>
+              </a:rPr>
+              <a:t>vụ</a:t>
+            </a:r>
+            <a:r>
+              <a:rPr sz="1500" b="0" i="0" u="none" dirty="0">
+                <a:solidFill>
+                  <a:srgbClr val="334155"/>
+                </a:solidFill>
+                <a:latin typeface="Times New Roman"/>
+              </a:rPr>
+              <a:t> </a:t>
+            </a:r>
+            <a:r>
+              <a:rPr sz="1500" b="0" i="0" u="none" dirty="0" err="1">
+                <a:solidFill>
+                  <a:srgbClr val="334155"/>
+                </a:solidFill>
+                <a:latin typeface="Times New Roman"/>
+              </a:rPr>
+              <a:t>phía</a:t>
+            </a:r>
+            <a:r>
+              <a:rPr sz="1500" b="0" i="0" u="none" dirty="0">
+                <a:solidFill>
+                  <a:srgbClr val="334155"/>
+                </a:solidFill>
+                <a:latin typeface="Times New Roman"/>
+              </a:rPr>
+              <a:t> </a:t>
+            </a:r>
+            <a:r>
+              <a:rPr sz="1500" b="0" i="0" u="none" dirty="0" err="1">
+                <a:solidFill>
+                  <a:srgbClr val="334155"/>
+                </a:solidFill>
+                <a:latin typeface="Times New Roman"/>
+              </a:rPr>
+              <a:t>máy</a:t>
+            </a:r>
+            <a:r>
+              <a:rPr sz="1500" b="0" i="0" u="none" dirty="0">
+                <a:solidFill>
+                  <a:srgbClr val="334155"/>
+                </a:solidFill>
+                <a:latin typeface="Times New Roman"/>
+              </a:rPr>
+              <a:t> </a:t>
+            </a:r>
+            <a:r>
+              <a:rPr sz="1500" b="0" i="0" u="none" dirty="0" err="1">
+                <a:solidFill>
+                  <a:srgbClr val="334155"/>
+                </a:solidFill>
+                <a:latin typeface="Times New Roman"/>
+              </a:rPr>
+              <a:t>chủ</a:t>
+            </a:r>
+            <a:r>
+              <a:rPr sz="1500" b="0" i="0" u="none" dirty="0">
+                <a:solidFill>
+                  <a:srgbClr val="334155"/>
+                </a:solidFill>
+                <a:latin typeface="Times New Roman"/>
+              </a:rPr>
+              <a:t> </a:t>
+            </a:r>
+            <a:r>
+              <a:rPr sz="1500" b="0" i="0" u="none" dirty="0" err="1">
+                <a:solidFill>
+                  <a:srgbClr val="334155"/>
+                </a:solidFill>
+                <a:latin typeface="Times New Roman"/>
+              </a:rPr>
+              <a:t>bằng</a:t>
+            </a:r>
+            <a:r>
+              <a:rPr sz="1500" b="0" i="0" u="none" dirty="0">
+                <a:solidFill>
+                  <a:srgbClr val="334155"/>
+                </a:solidFill>
+                <a:latin typeface="Times New Roman"/>
+              </a:rPr>
+              <a:t> </a:t>
+            </a:r>
+            <a:r>
+              <a:rPr sz="1500" b="1" i="0" u="none" dirty="0">
                 <a:solidFill>
                   <a:srgbClr val="334155"/>
                 </a:solidFill>
@@ -31845,7 +32302,7 @@
               <a:t>ASP.NET Core Web API (Backend)</a:t>
             </a:r>
             <a:r>
-              <a:rPr sz="1500" b="0" i="0" u="none">
+              <a:rPr sz="1500" b="0" i="0" u="none" dirty="0">
                 <a:solidFill>
                   <a:srgbClr val="334155"/>
                 </a:solidFill>
@@ -32049,7 +32506,7 @@
 </p:sld>
 </file>
 
-<file path=ppt/slides/slide4.xml><?xml version="1.0" encoding="utf-8"?>
+<file path=ppt/slides/slide5.xml><?xml version="1.0" encoding="utf-8"?>
 <p:sld xmlns:a="http://schemas.openxmlformats.org/drawingml/2006/main" xmlns:r="http://schemas.openxmlformats.org/officeDocument/2006/relationships" xmlns:p="http://schemas.openxmlformats.org/presentationml/2006/main">
   <p:cSld>
     <p:bg>
@@ -33219,7 +33676,7 @@
 </p:sld>
 </file>
 
-<file path=ppt/slides/slide5.xml><?xml version="1.0" encoding="utf-8"?>
+<file path=ppt/slides/slide6.xml><?xml version="1.0" encoding="utf-8"?>
 <p:sld xmlns:a="http://schemas.openxmlformats.org/drawingml/2006/main" xmlns:r="http://schemas.openxmlformats.org/officeDocument/2006/relationships" xmlns:p="http://schemas.openxmlformats.org/presentationml/2006/main">
   <p:cSld>
     <p:bg>
@@ -33586,7 +34043,7 @@
 </p:sld>
 </file>
 
-<file path=ppt/slides/slide6.xml><?xml version="1.0" encoding="utf-8"?>
+<file path=ppt/slides/slide7.xml><?xml version="1.0" encoding="utf-8"?>
 <p:sld xmlns:a="http://schemas.openxmlformats.org/drawingml/2006/main" xmlns:r="http://schemas.openxmlformats.org/officeDocument/2006/relationships" xmlns:p="http://schemas.openxmlformats.org/presentationml/2006/main">
   <p:cSld>
     <p:bg>
@@ -33889,609 +34346,6 @@
       <p:sp>
         <p:nvSpPr>
           <p:cNvPr id="10" name="Rectangle 9"/>
-          <p:cNvSpPr/>
-          <p:nvPr/>
-        </p:nvSpPr>
-        <p:spPr>
-          <a:xfrm>
-            <a:off x="571500" y="1219200"/>
-            <a:ext cx="11049000" cy="19050"/>
-          </a:xfrm>
-          <a:prstGeom prst="rect">
-            <a:avLst/>
-          </a:prstGeom>
-          <a:solidFill>
-            <a:srgbClr val="005088"/>
-          </a:solidFill>
-          <a:ln>
-            <a:noFill/>
-          </a:ln>
-          <a:effectLst/>
-        </p:spPr>
-        <p:style>
-          <a:lnRef idx="1">
-            <a:schemeClr val="accent1"/>
-          </a:lnRef>
-          <a:fillRef idx="3">
-            <a:schemeClr val="accent1"/>
-          </a:fillRef>
-          <a:effectRef idx="2">
-            <a:schemeClr val="accent1"/>
-          </a:effectRef>
-          <a:fontRef idx="minor">
-            <a:schemeClr val="lt1"/>
-          </a:fontRef>
-        </p:style>
-        <p:txBody>
-          <a:bodyPr rtlCol="0" anchor="ctr"/>
-          <a:lstStyle/>
-          <a:p>
-            <a:pPr algn="ctr"/>
-            <a:endParaRPr/>
-          </a:p>
-        </p:txBody>
-      </p:sp>
-    </p:spTree>
-  </p:cSld>
-  <p:clrMapOvr>
-    <a:masterClrMapping/>
-  </p:clrMapOvr>
-</p:sld>
-</file>
-
-<file path=ppt/slides/slide7.xml><?xml version="1.0" encoding="utf-8"?>
-<p:sld xmlns:a="http://schemas.openxmlformats.org/drawingml/2006/main" xmlns:r="http://schemas.openxmlformats.org/officeDocument/2006/relationships" xmlns:p="http://schemas.openxmlformats.org/presentationml/2006/main">
-  <p:cSld>
-    <p:bg>
-      <p:bgPr>
-        <a:solidFill>
-          <a:srgbClr val="FFFFFF"/>
-        </a:solidFill>
-        <a:effectLst/>
-      </p:bgPr>
-    </p:bg>
-    <p:spTree>
-      <p:nvGrpSpPr>
-        <p:cNvPr id="1" name=""/>
-        <p:cNvGrpSpPr/>
-        <p:nvPr/>
-      </p:nvGrpSpPr>
-      <p:grpSpPr>
-        <a:xfrm>
-          <a:off x="0" y="0"/>
-          <a:ext cx="0" cy="0"/>
-          <a:chOff x="0" y="0"/>
-          <a:chExt cx="0" cy="0"/>
-        </a:xfrm>
-      </p:grpSpPr>
-      <p:pic>
-        <p:nvPicPr>
-          <p:cNvPr id="2" name="Picture 1" descr="image.png"/>
-          <p:cNvPicPr>
-            <a:picLocks noChangeAspect="1"/>
-          </p:cNvPicPr>
-          <p:nvPr/>
-        </p:nvPicPr>
-        <p:blipFill>
-          <a:blip r:embed="rId2"/>
-          <a:stretch>
-            <a:fillRect/>
-          </a:stretch>
-        </p:blipFill>
-        <p:spPr>
-          <a:xfrm>
-            <a:off x="0" y="0"/>
-            <a:ext cx="12192000" cy="6858000"/>
-          </a:xfrm>
-          <a:prstGeom prst="rect">
-            <a:avLst/>
-          </a:prstGeom>
-        </p:spPr>
-      </p:pic>
-      <p:pic>
-        <p:nvPicPr>
-          <p:cNvPr id="3" name="Picture 2" descr="image.png"/>
-          <p:cNvPicPr>
-            <a:picLocks noChangeAspect="1"/>
-          </p:cNvPicPr>
-          <p:nvPr/>
-        </p:nvPicPr>
-        <p:blipFill>
-          <a:blip r:embed="rId3"/>
-          <a:stretch>
-            <a:fillRect/>
-          </a:stretch>
-        </p:blipFill>
-        <p:spPr>
-          <a:xfrm>
-            <a:off x="6381750" y="2047875"/>
-            <a:ext cx="5238750" cy="3810000"/>
-          </a:xfrm>
-          <a:prstGeom prst="rect">
-            <a:avLst/>
-          </a:prstGeom>
-        </p:spPr>
-      </p:pic>
-      <p:sp>
-        <p:nvSpPr>
-          <p:cNvPr id="4" name="TextBox 3"/>
-          <p:cNvSpPr txBox="1"/>
-          <p:nvPr/>
-        </p:nvSpPr>
-        <p:spPr>
-          <a:xfrm>
-            <a:off x="571500" y="2190750"/>
-            <a:ext cx="5500687" cy="323850"/>
-          </a:xfrm>
-          <a:prstGeom prst="rect">
-            <a:avLst/>
-          </a:prstGeom>
-          <a:noFill/>
-        </p:spPr>
-        <p:txBody>
-          <a:bodyPr wrap="square" lIns="0" tIns="0" rIns="0" bIns="0" anchor="t">
-            <a:spAutoFit/>
-          </a:bodyPr>
-          <a:lstStyle/>
-          <a:p>
-            <a:pPr algn="l"/>
-            <a:r>
-              <a:rPr sz="2250" b="1" i="0" u="none">
-                <a:solidFill>
-                  <a:srgbClr val="1E293B"/>
-                </a:solidFill>
-                <a:latin typeface="Times New Roman"/>
-              </a:rPr>
-              <a:t>Tương tác nội bộ</a:t>
-            </a:r>
-          </a:p>
-        </p:txBody>
-      </p:sp>
-      <p:sp>
-        <p:nvSpPr>
-          <p:cNvPr id="5" name="TextBox 4"/>
-          <p:cNvSpPr txBox="1"/>
-          <p:nvPr/>
-        </p:nvSpPr>
-        <p:spPr>
-          <a:xfrm>
-            <a:off x="571500" y="4286250"/>
-            <a:ext cx="5500687" cy="323850"/>
-          </a:xfrm>
-          <a:prstGeom prst="rect">
-            <a:avLst/>
-          </a:prstGeom>
-          <a:noFill/>
-        </p:spPr>
-        <p:txBody>
-          <a:bodyPr wrap="square" lIns="0" tIns="0" rIns="0" bIns="0" anchor="t">
-            <a:spAutoFit/>
-          </a:bodyPr>
-          <a:lstStyle/>
-          <a:p>
-            <a:pPr algn="l"/>
-            <a:r>
-              <a:rPr sz="2250" b="1" i="0" u="none">
-                <a:solidFill>
-                  <a:srgbClr val="1E293B"/>
-                </a:solidFill>
-                <a:latin typeface="Times New Roman"/>
-              </a:rPr>
-              <a:t>Quản lý dữ liệu</a:t>
-            </a:r>
-          </a:p>
-        </p:txBody>
-      </p:sp>
-      <p:sp>
-        <p:nvSpPr>
-          <p:cNvPr id="6" name="TextBox 5"/>
-          <p:cNvSpPr txBox="1"/>
-          <p:nvPr/>
-        </p:nvSpPr>
-        <p:spPr>
-          <a:xfrm>
-            <a:off x="809625" y="2667000"/>
-            <a:ext cx="5000625" cy="571500"/>
-          </a:xfrm>
-          <a:prstGeom prst="rect">
-            <a:avLst/>
-          </a:prstGeom>
-          <a:noFill/>
-        </p:spPr>
-        <p:txBody>
-          <a:bodyPr wrap="square" lIns="0" tIns="0" rIns="0" bIns="0" anchor="t">
-            <a:spAutoFit/>
-          </a:bodyPr>
-          <a:lstStyle/>
-          <a:p>
-            <a:pPr algn="l">
-              <a:lnSpc>
-                <a:spcPts val="2250"/>
-              </a:lnSpc>
-            </a:pPr>
-            <a:r>
-              <a:rPr sz="1500" b="1" i="0" u="none">
-                <a:solidFill>
-                  <a:srgbClr val="334155"/>
-                </a:solidFill>
-                <a:latin typeface="Times New Roman"/>
-              </a:rPr>
-              <a:t>Mini Chat:</a:t>
-            </a:r>
-            <a:r>
-              <a:rPr sz="1500" b="0" i="0" u="none">
-                <a:solidFill>
-                  <a:srgbClr val="334155"/>
-                </a:solidFill>
-                <a:latin typeface="Times New Roman"/>
-              </a:rPr>
-              <a:t> Không gian trao đổi, thảo luận trực tiếp giữa các thành viên trong nhóm làm đồ án.</a:t>
-            </a:r>
-          </a:p>
-        </p:txBody>
-      </p:sp>
-      <p:sp>
-        <p:nvSpPr>
-          <p:cNvPr id="7" name="TextBox 6"/>
-          <p:cNvSpPr txBox="1"/>
-          <p:nvPr/>
-        </p:nvSpPr>
-        <p:spPr>
-          <a:xfrm>
-            <a:off x="809625" y="3429000"/>
-            <a:ext cx="5000625" cy="571500"/>
-          </a:xfrm>
-          <a:prstGeom prst="rect">
-            <a:avLst/>
-          </a:prstGeom>
-          <a:noFill/>
-        </p:spPr>
-        <p:txBody>
-          <a:bodyPr wrap="square" lIns="0" tIns="0" rIns="0" bIns="0" anchor="t">
-            <a:spAutoFit/>
-          </a:bodyPr>
-          <a:lstStyle/>
-          <a:p>
-            <a:pPr algn="l">
-              <a:lnSpc>
-                <a:spcPts val="2250"/>
-              </a:lnSpc>
-            </a:pPr>
-            <a:r>
-              <a:rPr sz="1500" b="1" i="0" u="none">
-                <a:solidFill>
-                  <a:srgbClr val="334155"/>
-                </a:solidFill>
-                <a:latin typeface="Times New Roman"/>
-              </a:rPr>
-              <a:t>Thông báo hệ thống:</a:t>
-            </a:r>
-            <a:r>
-              <a:rPr sz="1500" b="0" i="0" u="none">
-                <a:solidFill>
-                  <a:srgbClr val="334155"/>
-                </a:solidFill>
-                <a:latin typeface="Times New Roman"/>
-              </a:rPr>
-              <a:t> Cập nhật trạng thái duyệt đề tài và tin nhắn nội bộ theo thời gian thực (Realtime).</a:t>
-            </a:r>
-          </a:p>
-        </p:txBody>
-      </p:sp>
-      <p:sp>
-        <p:nvSpPr>
-          <p:cNvPr id="8" name="TextBox 7"/>
-          <p:cNvSpPr txBox="1"/>
-          <p:nvPr/>
-        </p:nvSpPr>
-        <p:spPr>
-          <a:xfrm>
-            <a:off x="809625" y="4762500"/>
-            <a:ext cx="5000625" cy="285750"/>
-          </a:xfrm>
-          <a:prstGeom prst="rect">
-            <a:avLst/>
-          </a:prstGeom>
-          <a:noFill/>
-        </p:spPr>
-        <p:txBody>
-          <a:bodyPr wrap="square" lIns="0" tIns="0" rIns="0" bIns="0" anchor="t">
-            <a:spAutoFit/>
-          </a:bodyPr>
-          <a:lstStyle/>
-          <a:p>
-            <a:pPr algn="l">
-              <a:lnSpc>
-                <a:spcPts val="2250"/>
-              </a:lnSpc>
-            </a:pPr>
-            <a:r>
-              <a:rPr sz="1500" b="0" i="0" u="none">
-                <a:solidFill>
-                  <a:srgbClr val="334155"/>
-                </a:solidFill>
-                <a:latin typeface="Times New Roman"/>
-              </a:rPr>
-              <a:t>Hỗ trợ tính năng </a:t>
-            </a:r>
-            <a:r>
-              <a:rPr sz="1500" b="1" i="0" u="none">
-                <a:solidFill>
-                  <a:srgbClr val="334155"/>
-                </a:solidFill>
-                <a:latin typeface="Times New Roman"/>
-              </a:rPr>
-              <a:t>Import danh sách Excel</a:t>
-            </a:r>
-            <a:r>
-              <a:rPr sz="1500" b="0" i="0" u="none">
-                <a:solidFill>
-                  <a:srgbClr val="334155"/>
-                </a:solidFill>
-                <a:latin typeface="Times New Roman"/>
-              </a:rPr>
-              <a:t>.</a:t>
-            </a:r>
-          </a:p>
-        </p:txBody>
-      </p:sp>
-      <p:sp>
-        <p:nvSpPr>
-          <p:cNvPr id="9" name="TextBox 8"/>
-          <p:cNvSpPr txBox="1"/>
-          <p:nvPr/>
-        </p:nvSpPr>
-        <p:spPr>
-          <a:xfrm>
-            <a:off x="809625" y="5238750"/>
-            <a:ext cx="5000625" cy="285750"/>
-          </a:xfrm>
-          <a:prstGeom prst="rect">
-            <a:avLst/>
-          </a:prstGeom>
-          <a:noFill/>
-        </p:spPr>
-        <p:txBody>
-          <a:bodyPr wrap="square" lIns="0" tIns="0" rIns="0" bIns="0" anchor="t">
-            <a:spAutoFit/>
-          </a:bodyPr>
-          <a:lstStyle/>
-          <a:p>
-            <a:pPr algn="l">
-              <a:lnSpc>
-                <a:spcPts val="2250"/>
-              </a:lnSpc>
-            </a:pPr>
-            <a:r>
-              <a:rPr sz="1500" b="0" i="0" u="none">
-                <a:solidFill>
-                  <a:srgbClr val="334155"/>
-                </a:solidFill>
-                <a:latin typeface="Times New Roman"/>
-              </a:rPr>
-              <a:t>Phân quyền và quản lý danh mục hệ thống chặt chẽ.</a:t>
-            </a:r>
-          </a:p>
-        </p:txBody>
-      </p:sp>
-      <p:pic>
-        <p:nvPicPr>
-          <p:cNvPr id="10" name="Picture 9" descr="image.png"/>
-          <p:cNvPicPr>
-            <a:picLocks noChangeAspect="1"/>
-          </p:cNvPicPr>
-          <p:nvPr/>
-        </p:nvPicPr>
-        <p:blipFill>
-          <a:blip r:embed="rId4"/>
-          <a:stretch>
-            <a:fillRect/>
-          </a:stretch>
-        </p:blipFill>
-        <p:spPr>
-          <a:xfrm>
-            <a:off x="6391275" y="2057400"/>
-            <a:ext cx="5219700" cy="3790950"/>
-          </a:xfrm>
-          <a:prstGeom prst="rect">
-            <a:avLst/>
-          </a:prstGeom>
-        </p:spPr>
-      </p:pic>
-      <p:sp>
-        <p:nvSpPr>
-          <p:cNvPr id="11" name="TextBox 10"/>
-          <p:cNvSpPr txBox="1"/>
-          <p:nvPr/>
-        </p:nvSpPr>
-        <p:spPr>
-          <a:xfrm>
-            <a:off x="571500" y="2647950"/>
-            <a:ext cx="66675" cy="314325"/>
-          </a:xfrm>
-          <a:prstGeom prst="rect">
-            <a:avLst/>
-          </a:prstGeom>
-          <a:noFill/>
-        </p:spPr>
-        <p:txBody>
-          <a:bodyPr wrap="square" lIns="0" tIns="0" rIns="0" bIns="0" anchor="t">
-            <a:spAutoFit/>
-          </a:bodyPr>
-          <a:lstStyle/>
-          <a:p>
-            <a:pPr algn="l">
-              <a:lnSpc>
-                <a:spcPts val="2475"/>
-              </a:lnSpc>
-            </a:pPr>
-            <a:r>
-              <a:rPr sz="1650" b="1" i="0" u="none">
-                <a:solidFill>
-                  <a:srgbClr val="005088"/>
-                </a:solidFill>
-                <a:latin typeface="Times New Roman"/>
-              </a:rPr>
-              <a:t>-</a:t>
-            </a:r>
-          </a:p>
-        </p:txBody>
-      </p:sp>
-      <p:sp>
-        <p:nvSpPr>
-          <p:cNvPr id="12" name="TextBox 11"/>
-          <p:cNvSpPr txBox="1"/>
-          <p:nvPr/>
-        </p:nvSpPr>
-        <p:spPr>
-          <a:xfrm>
-            <a:off x="571500" y="3409950"/>
-            <a:ext cx="66675" cy="314325"/>
-          </a:xfrm>
-          <a:prstGeom prst="rect">
-            <a:avLst/>
-          </a:prstGeom>
-          <a:noFill/>
-        </p:spPr>
-        <p:txBody>
-          <a:bodyPr wrap="square" lIns="0" tIns="0" rIns="0" bIns="0" anchor="t">
-            <a:spAutoFit/>
-          </a:bodyPr>
-          <a:lstStyle/>
-          <a:p>
-            <a:pPr algn="l">
-              <a:lnSpc>
-                <a:spcPts val="2475"/>
-              </a:lnSpc>
-            </a:pPr>
-            <a:r>
-              <a:rPr sz="1650" b="1" i="0" u="none">
-                <a:solidFill>
-                  <a:srgbClr val="005088"/>
-                </a:solidFill>
-                <a:latin typeface="Times New Roman"/>
-              </a:rPr>
-              <a:t>-</a:t>
-            </a:r>
-          </a:p>
-        </p:txBody>
-      </p:sp>
-      <p:sp>
-        <p:nvSpPr>
-          <p:cNvPr id="13" name="TextBox 12"/>
-          <p:cNvSpPr txBox="1"/>
-          <p:nvPr/>
-        </p:nvSpPr>
-        <p:spPr>
-          <a:xfrm>
-            <a:off x="571500" y="4743450"/>
-            <a:ext cx="66675" cy="314325"/>
-          </a:xfrm>
-          <a:prstGeom prst="rect">
-            <a:avLst/>
-          </a:prstGeom>
-          <a:noFill/>
-        </p:spPr>
-        <p:txBody>
-          <a:bodyPr wrap="square" lIns="0" tIns="0" rIns="0" bIns="0" anchor="t">
-            <a:spAutoFit/>
-          </a:bodyPr>
-          <a:lstStyle/>
-          <a:p>
-            <a:pPr algn="l">
-              <a:lnSpc>
-                <a:spcPts val="2475"/>
-              </a:lnSpc>
-            </a:pPr>
-            <a:r>
-              <a:rPr sz="1650" b="1" i="0" u="none">
-                <a:solidFill>
-                  <a:srgbClr val="005088"/>
-                </a:solidFill>
-                <a:latin typeface="Times New Roman"/>
-              </a:rPr>
-              <a:t>-</a:t>
-            </a:r>
-          </a:p>
-        </p:txBody>
-      </p:sp>
-      <p:sp>
-        <p:nvSpPr>
-          <p:cNvPr id="14" name="TextBox 13"/>
-          <p:cNvSpPr txBox="1"/>
-          <p:nvPr/>
-        </p:nvSpPr>
-        <p:spPr>
-          <a:xfrm>
-            <a:off x="571500" y="5219700"/>
-            <a:ext cx="66675" cy="314325"/>
-          </a:xfrm>
-          <a:prstGeom prst="rect">
-            <a:avLst/>
-          </a:prstGeom>
-          <a:noFill/>
-        </p:spPr>
-        <p:txBody>
-          <a:bodyPr wrap="square" lIns="0" tIns="0" rIns="0" bIns="0" anchor="t">
-            <a:spAutoFit/>
-          </a:bodyPr>
-          <a:lstStyle/>
-          <a:p>
-            <a:pPr algn="l">
-              <a:lnSpc>
-                <a:spcPts val="2475"/>
-              </a:lnSpc>
-            </a:pPr>
-            <a:r>
-              <a:rPr sz="1650" b="1" i="0" u="none">
-                <a:solidFill>
-                  <a:srgbClr val="005088"/>
-                </a:solidFill>
-                <a:latin typeface="Times New Roman"/>
-              </a:rPr>
-              <a:t>-</a:t>
-            </a:r>
-          </a:p>
-        </p:txBody>
-      </p:sp>
-      <p:sp>
-        <p:nvSpPr>
-          <p:cNvPr id="15" name="TextBox 14"/>
-          <p:cNvSpPr txBox="1"/>
-          <p:nvPr/>
-        </p:nvSpPr>
-        <p:spPr>
-          <a:xfrm>
-            <a:off x="571500" y="571500"/>
-            <a:ext cx="11601450" cy="523875"/>
-          </a:xfrm>
-          <a:prstGeom prst="rect">
-            <a:avLst/>
-          </a:prstGeom>
-          <a:noFill/>
-        </p:spPr>
-        <p:txBody>
-          <a:bodyPr wrap="square" lIns="0" tIns="0" rIns="0" bIns="0" anchor="t">
-            <a:spAutoFit/>
-          </a:bodyPr>
-          <a:lstStyle/>
-          <a:p>
-            <a:pPr algn="l"/>
-            <a:r>
-              <a:rPr sz="3450" b="1" i="0" u="none">
-                <a:solidFill>
-                  <a:srgbClr val="1E293B"/>
-                </a:solidFill>
-                <a:latin typeface="Times New Roman"/>
-              </a:rPr>
-              <a:t>Chức năng Cốt lõi: Tương tác &amp; Dữ liệu</a:t>
-            </a:r>
-          </a:p>
-        </p:txBody>
-      </p:sp>
-      <p:sp>
-        <p:nvSpPr>
-          <p:cNvPr id="16" name="Rectangle 15"/>
           <p:cNvSpPr/>
           <p:nvPr/>
         </p:nvSpPr>
@@ -34607,17 +34461,279 @@
         </p:blipFill>
         <p:spPr>
           <a:xfrm>
-            <a:off x="571500" y="2314575"/>
-            <a:ext cx="3492549" cy="3276600"/>
+            <a:off x="6381750" y="2047875"/>
+            <a:ext cx="5238750" cy="3810000"/>
           </a:xfrm>
           <a:prstGeom prst="rect">
             <a:avLst/>
           </a:prstGeom>
         </p:spPr>
       </p:pic>
+      <p:sp>
+        <p:nvSpPr>
+          <p:cNvPr id="4" name="TextBox 3"/>
+          <p:cNvSpPr txBox="1"/>
+          <p:nvPr/>
+        </p:nvSpPr>
+        <p:spPr>
+          <a:xfrm>
+            <a:off x="571500" y="2190750"/>
+            <a:ext cx="5500687" cy="323850"/>
+          </a:xfrm>
+          <a:prstGeom prst="rect">
+            <a:avLst/>
+          </a:prstGeom>
+          <a:noFill/>
+        </p:spPr>
+        <p:txBody>
+          <a:bodyPr wrap="square" lIns="0" tIns="0" rIns="0" bIns="0" anchor="t">
+            <a:spAutoFit/>
+          </a:bodyPr>
+          <a:lstStyle/>
+          <a:p>
+            <a:pPr algn="l"/>
+            <a:r>
+              <a:rPr sz="2250" b="1" i="0" u="none">
+                <a:solidFill>
+                  <a:srgbClr val="1E293B"/>
+                </a:solidFill>
+                <a:latin typeface="Times New Roman"/>
+              </a:rPr>
+              <a:t>Tương tác nội bộ</a:t>
+            </a:r>
+          </a:p>
+        </p:txBody>
+      </p:sp>
+      <p:sp>
+        <p:nvSpPr>
+          <p:cNvPr id="5" name="TextBox 4"/>
+          <p:cNvSpPr txBox="1"/>
+          <p:nvPr/>
+        </p:nvSpPr>
+        <p:spPr>
+          <a:xfrm>
+            <a:off x="571500" y="4286250"/>
+            <a:ext cx="5500687" cy="323850"/>
+          </a:xfrm>
+          <a:prstGeom prst="rect">
+            <a:avLst/>
+          </a:prstGeom>
+          <a:noFill/>
+        </p:spPr>
+        <p:txBody>
+          <a:bodyPr wrap="square" lIns="0" tIns="0" rIns="0" bIns="0" anchor="t">
+            <a:spAutoFit/>
+          </a:bodyPr>
+          <a:lstStyle/>
+          <a:p>
+            <a:pPr algn="l"/>
+            <a:r>
+              <a:rPr sz="2250" b="1" i="0" u="none">
+                <a:solidFill>
+                  <a:srgbClr val="1E293B"/>
+                </a:solidFill>
+                <a:latin typeface="Times New Roman"/>
+              </a:rPr>
+              <a:t>Quản lý dữ liệu</a:t>
+            </a:r>
+          </a:p>
+        </p:txBody>
+      </p:sp>
+      <p:sp>
+        <p:nvSpPr>
+          <p:cNvPr id="6" name="TextBox 5"/>
+          <p:cNvSpPr txBox="1"/>
+          <p:nvPr/>
+        </p:nvSpPr>
+        <p:spPr>
+          <a:xfrm>
+            <a:off x="809625" y="2667000"/>
+            <a:ext cx="5000625" cy="571500"/>
+          </a:xfrm>
+          <a:prstGeom prst="rect">
+            <a:avLst/>
+          </a:prstGeom>
+          <a:noFill/>
+        </p:spPr>
+        <p:txBody>
+          <a:bodyPr wrap="square" lIns="0" tIns="0" rIns="0" bIns="0" anchor="t">
+            <a:spAutoFit/>
+          </a:bodyPr>
+          <a:lstStyle/>
+          <a:p>
+            <a:pPr algn="l">
+              <a:lnSpc>
+                <a:spcPts val="2250"/>
+              </a:lnSpc>
+            </a:pPr>
+            <a:r>
+              <a:rPr sz="1500" b="1" i="0" u="none">
+                <a:solidFill>
+                  <a:srgbClr val="334155"/>
+                </a:solidFill>
+                <a:latin typeface="Times New Roman"/>
+              </a:rPr>
+              <a:t>Mini Chat:</a:t>
+            </a:r>
+            <a:r>
+              <a:rPr sz="1500" b="0" i="0" u="none">
+                <a:solidFill>
+                  <a:srgbClr val="334155"/>
+                </a:solidFill>
+                <a:latin typeface="Times New Roman"/>
+              </a:rPr>
+              <a:t> Không gian trao đổi, thảo luận trực tiếp giữa các thành viên trong nhóm làm đồ án.</a:t>
+            </a:r>
+          </a:p>
+        </p:txBody>
+      </p:sp>
+      <p:sp>
+        <p:nvSpPr>
+          <p:cNvPr id="7" name="TextBox 6"/>
+          <p:cNvSpPr txBox="1"/>
+          <p:nvPr/>
+        </p:nvSpPr>
+        <p:spPr>
+          <a:xfrm>
+            <a:off x="809625" y="3429000"/>
+            <a:ext cx="5000625" cy="571500"/>
+          </a:xfrm>
+          <a:prstGeom prst="rect">
+            <a:avLst/>
+          </a:prstGeom>
+          <a:noFill/>
+        </p:spPr>
+        <p:txBody>
+          <a:bodyPr wrap="square" lIns="0" tIns="0" rIns="0" bIns="0" anchor="t">
+            <a:spAutoFit/>
+          </a:bodyPr>
+          <a:lstStyle/>
+          <a:p>
+            <a:pPr algn="l">
+              <a:lnSpc>
+                <a:spcPts val="2250"/>
+              </a:lnSpc>
+            </a:pPr>
+            <a:r>
+              <a:rPr sz="1500" b="1" i="0" u="none">
+                <a:solidFill>
+                  <a:srgbClr val="334155"/>
+                </a:solidFill>
+                <a:latin typeface="Times New Roman"/>
+              </a:rPr>
+              <a:t>Thông báo hệ thống:</a:t>
+            </a:r>
+            <a:r>
+              <a:rPr sz="1500" b="0" i="0" u="none">
+                <a:solidFill>
+                  <a:srgbClr val="334155"/>
+                </a:solidFill>
+                <a:latin typeface="Times New Roman"/>
+              </a:rPr>
+              <a:t> Cập nhật trạng thái duyệt đề tài và tin nhắn nội bộ theo thời gian thực (Realtime).</a:t>
+            </a:r>
+          </a:p>
+        </p:txBody>
+      </p:sp>
+      <p:sp>
+        <p:nvSpPr>
+          <p:cNvPr id="8" name="TextBox 7"/>
+          <p:cNvSpPr txBox="1"/>
+          <p:nvPr/>
+        </p:nvSpPr>
+        <p:spPr>
+          <a:xfrm>
+            <a:off x="809625" y="4762500"/>
+            <a:ext cx="5000625" cy="285750"/>
+          </a:xfrm>
+          <a:prstGeom prst="rect">
+            <a:avLst/>
+          </a:prstGeom>
+          <a:noFill/>
+        </p:spPr>
+        <p:txBody>
+          <a:bodyPr wrap="square" lIns="0" tIns="0" rIns="0" bIns="0" anchor="t">
+            <a:spAutoFit/>
+          </a:bodyPr>
+          <a:lstStyle/>
+          <a:p>
+            <a:pPr algn="l">
+              <a:lnSpc>
+                <a:spcPts val="2250"/>
+              </a:lnSpc>
+            </a:pPr>
+            <a:r>
+              <a:rPr sz="1500" b="0" i="0" u="none">
+                <a:solidFill>
+                  <a:srgbClr val="334155"/>
+                </a:solidFill>
+                <a:latin typeface="Times New Roman"/>
+              </a:rPr>
+              <a:t>Hỗ trợ tính năng </a:t>
+            </a:r>
+            <a:r>
+              <a:rPr sz="1500" b="1" i="0" u="none">
+                <a:solidFill>
+                  <a:srgbClr val="334155"/>
+                </a:solidFill>
+                <a:latin typeface="Times New Roman"/>
+              </a:rPr>
+              <a:t>Import danh sách Excel</a:t>
+            </a:r>
+            <a:r>
+              <a:rPr sz="1500" b="0" i="0" u="none">
+                <a:solidFill>
+                  <a:srgbClr val="334155"/>
+                </a:solidFill>
+                <a:latin typeface="Times New Roman"/>
+              </a:rPr>
+              <a:t>.</a:t>
+            </a:r>
+          </a:p>
+        </p:txBody>
+      </p:sp>
+      <p:sp>
+        <p:nvSpPr>
+          <p:cNvPr id="9" name="TextBox 8"/>
+          <p:cNvSpPr txBox="1"/>
+          <p:nvPr/>
+        </p:nvSpPr>
+        <p:spPr>
+          <a:xfrm>
+            <a:off x="809625" y="5238750"/>
+            <a:ext cx="5000625" cy="285750"/>
+          </a:xfrm>
+          <a:prstGeom prst="rect">
+            <a:avLst/>
+          </a:prstGeom>
+          <a:noFill/>
+        </p:spPr>
+        <p:txBody>
+          <a:bodyPr wrap="square" lIns="0" tIns="0" rIns="0" bIns="0" anchor="t">
+            <a:spAutoFit/>
+          </a:bodyPr>
+          <a:lstStyle/>
+          <a:p>
+            <a:pPr algn="l">
+              <a:lnSpc>
+                <a:spcPts val="2250"/>
+              </a:lnSpc>
+            </a:pPr>
+            <a:r>
+              <a:rPr sz="1500" b="0" i="0" u="none">
+                <a:solidFill>
+                  <a:srgbClr val="334155"/>
+                </a:solidFill>
+                <a:latin typeface="Times New Roman"/>
+              </a:rPr>
+              <a:t>Phân quyền và quản lý danh mục hệ thống chặt chẽ.</a:t>
+            </a:r>
+          </a:p>
+        </p:txBody>
+      </p:sp>
       <p:pic>
         <p:nvPicPr>
-          <p:cNvPr id="4" name="Picture 3" descr="image.png"/>
+          <p:cNvPr id="10" name="Picture 9" descr="image.png"/>
           <p:cNvPicPr>
             <a:picLocks noChangeAspect="1"/>
           </p:cNvPicPr>
@@ -34631,32 +34747,8 @@
         </p:blipFill>
         <p:spPr>
           <a:xfrm>
-            <a:off x="4349799" y="2314575"/>
-            <a:ext cx="3492549" cy="3276600"/>
-          </a:xfrm>
-          <a:prstGeom prst="rect">
-            <a:avLst/>
-          </a:prstGeom>
-        </p:spPr>
-      </p:pic>
-      <p:pic>
-        <p:nvPicPr>
-          <p:cNvPr id="5" name="Picture 4" descr="image.png"/>
-          <p:cNvPicPr>
-            <a:picLocks noChangeAspect="1"/>
-          </p:cNvPicPr>
-          <p:nvPr/>
-        </p:nvPicPr>
-        <p:blipFill>
-          <a:blip r:embed="rId5"/>
-          <a:stretch>
-            <a:fillRect/>
-          </a:stretch>
-        </p:blipFill>
-        <p:spPr>
-          <a:xfrm>
-            <a:off x="8128099" y="2314575"/>
-            <a:ext cx="3492549" cy="3276600"/>
+            <a:off x="6391275" y="2057400"/>
+            <a:ext cx="5219700" cy="3790950"/>
           </a:xfrm>
           <a:prstGeom prst="rect">
             <a:avLst/>
@@ -34665,14 +34757,14 @@
       </p:pic>
       <p:sp>
         <p:nvSpPr>
-          <p:cNvPr id="6" name="TextBox 5"/>
+          <p:cNvPr id="11" name="TextBox 10"/>
           <p:cNvSpPr txBox="1"/>
           <p:nvPr/>
         </p:nvSpPr>
         <p:spPr>
           <a:xfrm>
-            <a:off x="1171463" y="3448050"/>
-            <a:ext cx="2292474" cy="323850"/>
+            <a:off x="571500" y="2647950"/>
+            <a:ext cx="66675" cy="314325"/>
           </a:xfrm>
           <a:prstGeom prst="rect">
             <a:avLst/>
@@ -34685,29 +34777,33 @@
           </a:bodyPr>
           <a:lstStyle/>
           <a:p>
-            <a:pPr algn="ctr"/>
-            <a:r>
-              <a:rPr sz="2250" b="1" i="0" u="none">
+            <a:pPr algn="l">
+              <a:lnSpc>
+                <a:spcPts val="2475"/>
+              </a:lnSpc>
+            </a:pPr>
+            <a:r>
+              <a:rPr sz="1650" b="1" i="0" u="none">
                 <a:solidFill>
-                  <a:srgbClr val="1E293B"/>
+                  <a:srgbClr val="005088"/>
                 </a:solidFill>
                 <a:latin typeface="Times New Roman"/>
               </a:rPr>
-              <a:t>Quản trị hệ thống</a:t>
+              <a:t>-</a:t>
             </a:r>
           </a:p>
         </p:txBody>
       </p:sp>
       <p:sp>
         <p:nvSpPr>
-          <p:cNvPr id="7" name="TextBox 6"/>
+          <p:cNvPr id="12" name="TextBox 11"/>
           <p:cNvSpPr txBox="1"/>
           <p:nvPr/>
         </p:nvSpPr>
         <p:spPr>
           <a:xfrm>
-            <a:off x="866775" y="3914775"/>
-            <a:ext cx="2901999" cy="1143000"/>
+            <a:off x="571500" y="3409950"/>
+            <a:ext cx="66675" cy="314325"/>
           </a:xfrm>
           <a:prstGeom prst="rect">
             <a:avLst/>
@@ -34720,87 +34816,33 @@
           </a:bodyPr>
           <a:lstStyle/>
           <a:p>
-            <a:pPr algn="ctr">
+            <a:pPr algn="l">
               <a:lnSpc>
-                <a:spcPts val="2250"/>
+                <a:spcPts val="2475"/>
               </a:lnSpc>
             </a:pPr>
             <a:r>
-              <a:rPr sz="1500" b="0" i="0" u="none">
+              <a:rPr sz="1650" b="1" i="0" u="none">
                 <a:solidFill>
-                  <a:srgbClr val="334155"/>
+                  <a:srgbClr val="005088"/>
                 </a:solidFill>
                 <a:latin typeface="Times New Roman"/>
               </a:rPr>
-              <a:t>Bao gồm </a:t>
-            </a:r>
-            <a:r>
-              <a:rPr sz="1500" b="1" i="0" u="none">
-                <a:solidFill>
-                  <a:srgbClr val="334155"/>
-                </a:solidFill>
-                <a:latin typeface="Times New Roman"/>
-              </a:rPr>
-              <a:t>Admin Hệ thống</a:t>
-            </a:r>
-            <a:r>
-              <a:rPr sz="1500" b="0" i="0" u="none">
-                <a:solidFill>
-                  <a:srgbClr val="334155"/>
-                </a:solidFill>
-                <a:latin typeface="Times New Roman"/>
-              </a:rPr>
-              <a:t>, </a:t>
-            </a:r>
-            <a:r>
-              <a:rPr sz="1500" b="1" i="0" u="none">
-                <a:solidFill>
-                  <a:srgbClr val="334155"/>
-                </a:solidFill>
-                <a:latin typeface="Times New Roman"/>
-              </a:rPr>
-              <a:t>Phòng Đào tạo</a:t>
-            </a:r>
-            <a:r>
-              <a:rPr sz="1500" b="0" i="0" u="none">
-                <a:solidFill>
-                  <a:srgbClr val="334155"/>
-                </a:solidFill>
-                <a:latin typeface="Times New Roman"/>
-              </a:rPr>
-              <a:t>, và </a:t>
-            </a:r>
-            <a:r>
-              <a:rPr sz="1500" b="1" i="0" u="none">
-                <a:solidFill>
-                  <a:srgbClr val="334155"/>
-                </a:solidFill>
-                <a:latin typeface="Times New Roman"/>
-              </a:rPr>
-              <a:t>Giáo vụ Khoa</a:t>
-            </a:r>
-            <a:r>
-              <a:rPr sz="1500" b="0" i="0" u="none">
-                <a:solidFill>
-                  <a:srgbClr val="334155"/>
-                </a:solidFill>
-                <a:latin typeface="Times New Roman"/>
-              </a:rPr>
-              <a:t>. Chịu trách nhiệm quản lý danh mục, thiết lập đợt đăng ký và xuất dữ liệu.</a:t>
+              <a:t>-</a:t>
             </a:r>
           </a:p>
         </p:txBody>
       </p:sp>
       <p:sp>
         <p:nvSpPr>
-          <p:cNvPr id="8" name="TextBox 7"/>
+          <p:cNvPr id="13" name="TextBox 12"/>
           <p:cNvSpPr txBox="1"/>
           <p:nvPr/>
         </p:nvSpPr>
         <p:spPr>
           <a:xfrm>
-            <a:off x="5399971" y="3448050"/>
-            <a:ext cx="1392205" cy="323850"/>
+            <a:off x="571500" y="4743450"/>
+            <a:ext cx="66675" cy="314325"/>
           </a:xfrm>
           <a:prstGeom prst="rect">
             <a:avLst/>
@@ -34813,29 +34855,33 @@
           </a:bodyPr>
           <a:lstStyle/>
           <a:p>
-            <a:pPr algn="ctr"/>
-            <a:r>
-              <a:rPr sz="2250" b="1" i="0" u="none">
+            <a:pPr algn="l">
+              <a:lnSpc>
+                <a:spcPts val="2475"/>
+              </a:lnSpc>
+            </a:pPr>
+            <a:r>
+              <a:rPr sz="1650" b="1" i="0" u="none">
                 <a:solidFill>
-                  <a:srgbClr val="1E293B"/>
+                  <a:srgbClr val="005088"/>
                 </a:solidFill>
                 <a:latin typeface="Times New Roman"/>
               </a:rPr>
-              <a:t>Giảng viên</a:t>
+              <a:t>-</a:t>
             </a:r>
           </a:p>
         </p:txBody>
       </p:sp>
       <p:sp>
         <p:nvSpPr>
-          <p:cNvPr id="9" name="TextBox 8"/>
+          <p:cNvPr id="14" name="TextBox 13"/>
           <p:cNvSpPr txBox="1"/>
           <p:nvPr/>
         </p:nvSpPr>
         <p:spPr>
           <a:xfrm>
-            <a:off x="4645074" y="3914775"/>
-            <a:ext cx="2901999" cy="857250"/>
+            <a:off x="571500" y="5219700"/>
+            <a:ext cx="66675" cy="314325"/>
           </a:xfrm>
           <a:prstGeom prst="rect">
             <a:avLst/>
@@ -34848,205 +34894,23 @@
           </a:bodyPr>
           <a:lstStyle/>
           <a:p>
-            <a:pPr algn="ctr">
+            <a:pPr algn="l">
               <a:lnSpc>
-                <a:spcPts val="2250"/>
+                <a:spcPts val="2475"/>
               </a:lnSpc>
             </a:pPr>
             <a:r>
-              <a:rPr sz="1500" b="0" i="0" u="none">
+              <a:rPr sz="1650" b="1" i="0" u="none">
                 <a:solidFill>
-                  <a:srgbClr val="334155"/>
+                  <a:srgbClr val="005088"/>
                 </a:solidFill>
                 <a:latin typeface="Times New Roman"/>
               </a:rPr>
-              <a:t>Theo dõi danh sách sinh viên, trực tiếp xét duyệt các bản đề xuất đề tài đồ án và theo dõi tiến độ chung.</a:t>
+              <a:t>-</a:t>
             </a:r>
           </a:p>
         </p:txBody>
       </p:sp>
-      <p:sp>
-        <p:nvSpPr>
-          <p:cNvPr id="10" name="TextBox 9"/>
-          <p:cNvSpPr txBox="1"/>
-          <p:nvPr/>
-        </p:nvSpPr>
-        <p:spPr>
-          <a:xfrm>
-            <a:off x="9278127" y="3448050"/>
-            <a:ext cx="1192492" cy="323850"/>
-          </a:xfrm>
-          <a:prstGeom prst="rect">
-            <a:avLst/>
-          </a:prstGeom>
-          <a:noFill/>
-        </p:spPr>
-        <p:txBody>
-          <a:bodyPr wrap="square" lIns="0" tIns="0" rIns="0" bIns="0" anchor="t">
-            <a:spAutoFit/>
-          </a:bodyPr>
-          <a:lstStyle/>
-          <a:p>
-            <a:pPr algn="ctr"/>
-            <a:r>
-              <a:rPr sz="2250" b="1" i="0" u="none">
-                <a:solidFill>
-                  <a:srgbClr val="1E293B"/>
-                </a:solidFill>
-                <a:latin typeface="Times New Roman"/>
-              </a:rPr>
-              <a:t>Sinh viên</a:t>
-            </a:r>
-          </a:p>
-        </p:txBody>
-      </p:sp>
-      <p:sp>
-        <p:nvSpPr>
-          <p:cNvPr id="11" name="TextBox 10"/>
-          <p:cNvSpPr txBox="1"/>
-          <p:nvPr/>
-        </p:nvSpPr>
-        <p:spPr>
-          <a:xfrm>
-            <a:off x="8423374" y="3914775"/>
-            <a:ext cx="2901999" cy="1143000"/>
-          </a:xfrm>
-          <a:prstGeom prst="rect">
-            <a:avLst/>
-          </a:prstGeom>
-          <a:noFill/>
-        </p:spPr>
-        <p:txBody>
-          <a:bodyPr wrap="square" lIns="0" tIns="0" rIns="0" bIns="0" anchor="t">
-            <a:spAutoFit/>
-          </a:bodyPr>
-          <a:lstStyle/>
-          <a:p>
-            <a:pPr algn="ctr">
-              <a:lnSpc>
-                <a:spcPts val="2250"/>
-              </a:lnSpc>
-            </a:pPr>
-            <a:r>
-              <a:rPr sz="1500" b="0" i="0" u="none">
-                <a:solidFill>
-                  <a:srgbClr val="334155"/>
-                </a:solidFill>
-                <a:latin typeface="Times New Roman"/>
-              </a:rPr>
-              <a:t>Bao gồm </a:t>
-            </a:r>
-            <a:r>
-              <a:rPr sz="1500" b="1" i="0" u="none">
-                <a:solidFill>
-                  <a:srgbClr val="334155"/>
-                </a:solidFill>
-                <a:latin typeface="Times New Roman"/>
-              </a:rPr>
-              <a:t>Sinh viên</a:t>
-            </a:r>
-            <a:r>
-              <a:rPr sz="1500" b="0" i="0" u="none">
-                <a:solidFill>
-                  <a:srgbClr val="334155"/>
-                </a:solidFill>
-                <a:latin typeface="Times New Roman"/>
-              </a:rPr>
-              <a:t> và </a:t>
-            </a:r>
-            <a:r>
-              <a:rPr sz="1500" b="1" i="0" u="none">
-                <a:solidFill>
-                  <a:srgbClr val="334155"/>
-                </a:solidFill>
-                <a:latin typeface="Times New Roman"/>
-              </a:rPr>
-              <a:t>Trưởng nhóm</a:t>
-            </a:r>
-            <a:r>
-              <a:rPr sz="1500" b="0" i="0" u="none">
-                <a:solidFill>
-                  <a:srgbClr val="334155"/>
-                </a:solidFill>
-                <a:latin typeface="Times New Roman"/>
-              </a:rPr>
-              <a:t>. Tạo/tìm nhóm, nộp đề xuất, sử dụng AI gợi ý đề tài và trao đổi qua chat.</a:t>
-            </a:r>
-          </a:p>
-        </p:txBody>
-      </p:sp>
-      <p:pic>
-        <p:nvPicPr>
-          <p:cNvPr id="12" name="Picture 11" descr="image.png"/>
-          <p:cNvPicPr>
-            <a:picLocks noChangeAspect="1"/>
-          </p:cNvPicPr>
-          <p:nvPr/>
-        </p:nvPicPr>
-        <p:blipFill>
-          <a:blip r:embed="rId6"/>
-          <a:stretch>
-            <a:fillRect/>
-          </a:stretch>
-        </p:blipFill>
-        <p:spPr>
-          <a:xfrm>
-            <a:off x="2079575" y="2724150"/>
-            <a:ext cx="476250" cy="476250"/>
-          </a:xfrm>
-          <a:prstGeom prst="rect">
-            <a:avLst/>
-          </a:prstGeom>
-        </p:spPr>
-      </p:pic>
-      <p:pic>
-        <p:nvPicPr>
-          <p:cNvPr id="13" name="Picture 12" descr="image.png"/>
-          <p:cNvPicPr>
-            <a:picLocks noChangeAspect="1"/>
-          </p:cNvPicPr>
-          <p:nvPr/>
-        </p:nvPicPr>
-        <p:blipFill>
-          <a:blip r:embed="rId7"/>
-          <a:stretch>
-            <a:fillRect/>
-          </a:stretch>
-        </p:blipFill>
-        <p:spPr>
-          <a:xfrm>
-            <a:off x="5795962" y="2724150"/>
-            <a:ext cx="600075" cy="476250"/>
-          </a:xfrm>
-          <a:prstGeom prst="rect">
-            <a:avLst/>
-          </a:prstGeom>
-        </p:spPr>
-      </p:pic>
-      <p:pic>
-        <p:nvPicPr>
-          <p:cNvPr id="14" name="Picture 13" descr="image.png"/>
-          <p:cNvPicPr>
-            <a:picLocks noChangeAspect="1"/>
-          </p:cNvPicPr>
-          <p:nvPr/>
-        </p:nvPicPr>
-        <p:blipFill>
-          <a:blip r:embed="rId8"/>
-          <a:stretch>
-            <a:fillRect/>
-          </a:stretch>
-        </p:blipFill>
-        <p:spPr>
-          <a:xfrm>
-            <a:off x="9574262" y="2724150"/>
-            <a:ext cx="600075" cy="476250"/>
-          </a:xfrm>
-          <a:prstGeom prst="rect">
-            <a:avLst/>
-          </a:prstGeom>
-        </p:spPr>
-      </p:pic>
       <p:sp>
         <p:nvSpPr>
           <p:cNvPr id="15" name="TextBox 14"/>
@@ -35077,7 +34941,7 @@
                 </a:solidFill>
                 <a:latin typeface="Times New Roman"/>
               </a:rPr>
-              <a:t>Phân quyền Người dùng</a:t>
+              <a:t>Chức năng Cốt lõi: Tương tác &amp; Dữ liệu</a:t>
             </a:r>
           </a:p>
         </p:txBody>
@@ -35169,7 +35033,7 @@
           <p:nvPr/>
         </p:nvPicPr>
         <p:blipFill>
-          <a:blip r:embed="rId2"/>
+          <a:blip r:embed="rId3"/>
           <a:stretch>
             <a:fillRect/>
           </a:stretch>
@@ -35184,16 +35048,123 @@
           </a:prstGeom>
         </p:spPr>
       </p:pic>
+      <p:pic>
+        <p:nvPicPr>
+          <p:cNvPr id="3" name="Picture 2" descr="image.png"/>
+          <p:cNvPicPr>
+            <a:picLocks noChangeAspect="1"/>
+          </p:cNvPicPr>
+          <p:nvPr/>
+        </p:nvPicPr>
+        <p:blipFill>
+          <a:blip r:embed="rId4"/>
+          <a:stretch>
+            <a:fillRect/>
+          </a:stretch>
+        </p:blipFill>
+        <p:spPr>
+          <a:xfrm>
+            <a:off x="571500" y="2314575"/>
+            <a:ext cx="3492549" cy="3276600"/>
+          </a:xfrm>
+          <a:prstGeom prst="rect">
+            <a:avLst/>
+          </a:prstGeom>
+        </p:spPr>
+      </p:pic>
+      <p:pic>
+        <p:nvPicPr>
+          <p:cNvPr id="4" name="Picture 3" descr="image.png"/>
+          <p:cNvPicPr>
+            <a:picLocks noChangeAspect="1"/>
+          </p:cNvPicPr>
+          <p:nvPr/>
+        </p:nvPicPr>
+        <p:blipFill>
+          <a:blip r:embed="rId5"/>
+          <a:stretch>
+            <a:fillRect/>
+          </a:stretch>
+        </p:blipFill>
+        <p:spPr>
+          <a:xfrm>
+            <a:off x="4349799" y="2314575"/>
+            <a:ext cx="3492549" cy="3276600"/>
+          </a:xfrm>
+          <a:prstGeom prst="rect">
+            <a:avLst/>
+          </a:prstGeom>
+        </p:spPr>
+      </p:pic>
+      <p:pic>
+        <p:nvPicPr>
+          <p:cNvPr id="5" name="Picture 4" descr="image.png"/>
+          <p:cNvPicPr>
+            <a:picLocks noChangeAspect="1"/>
+          </p:cNvPicPr>
+          <p:nvPr/>
+        </p:nvPicPr>
+        <p:blipFill>
+          <a:blip r:embed="rId6"/>
+          <a:stretch>
+            <a:fillRect/>
+          </a:stretch>
+        </p:blipFill>
+        <p:spPr>
+          <a:xfrm>
+            <a:off x="8128099" y="2314575"/>
+            <a:ext cx="3492549" cy="3276600"/>
+          </a:xfrm>
+          <a:prstGeom prst="rect">
+            <a:avLst/>
+          </a:prstGeom>
+        </p:spPr>
+      </p:pic>
       <p:sp>
         <p:nvSpPr>
-          <p:cNvPr id="4" name="TextBox 3"/>
+          <p:cNvPr id="6" name="TextBox 5"/>
           <p:cNvSpPr txBox="1"/>
           <p:nvPr/>
         </p:nvSpPr>
         <p:spPr>
           <a:xfrm>
-            <a:off x="951035" y="2633493"/>
-            <a:ext cx="2864827" cy="1591013"/>
+            <a:off x="1171463" y="3448050"/>
+            <a:ext cx="2292474" cy="323850"/>
+          </a:xfrm>
+          <a:prstGeom prst="rect">
+            <a:avLst/>
+          </a:prstGeom>
+          <a:noFill/>
+        </p:spPr>
+        <p:txBody>
+          <a:bodyPr wrap="square" lIns="0" tIns="0" rIns="0" bIns="0" anchor="t">
+            <a:spAutoFit/>
+          </a:bodyPr>
+          <a:lstStyle/>
+          <a:p>
+            <a:pPr algn="ctr"/>
+            <a:r>
+              <a:rPr sz="2250" b="1" i="0" u="none">
+                <a:solidFill>
+                  <a:srgbClr val="1E293B"/>
+                </a:solidFill>
+                <a:latin typeface="Times New Roman"/>
+              </a:rPr>
+              <a:t>Quản trị hệ thống</a:t>
+            </a:r>
+          </a:p>
+        </p:txBody>
+      </p:sp>
+      <p:sp>
+        <p:nvSpPr>
+          <p:cNvPr id="7" name="TextBox 6"/>
+          <p:cNvSpPr txBox="1"/>
+          <p:nvPr/>
+        </p:nvSpPr>
+        <p:spPr>
+          <a:xfrm>
+            <a:off x="866775" y="3914775"/>
+            <a:ext cx="2901999" cy="1143000"/>
           </a:xfrm>
           <a:prstGeom prst="rect">
             <a:avLst/>
@@ -35208,57 +35179,726 @@
           <a:p>
             <a:pPr algn="ctr">
               <a:lnSpc>
-                <a:spcPts val="6480"/>
+                <a:spcPts val="2250"/>
               </a:lnSpc>
             </a:pPr>
             <a:r>
-              <a:rPr lang="en-US" sz="4400" b="1" dirty="0">
+              <a:rPr sz="1500" b="0" i="0" u="none">
                 <a:solidFill>
-                  <a:srgbClr val="005088"/>
+                  <a:srgbClr val="334155"/>
                 </a:solidFill>
                 <a:latin typeface="Times New Roman"/>
               </a:rPr>
-              <a:t>SƠ DỒ USE CASE</a:t>
-            </a:r>
-            <a:endParaRPr sz="4400" b="1" dirty="0">
-              <a:solidFill>
-                <a:srgbClr val="005088"/>
-              </a:solidFill>
-              <a:latin typeface="Times New Roman"/>
-            </a:endParaRPr>
+              <a:t>Bao gồm </a:t>
+            </a:r>
+            <a:r>
+              <a:rPr sz="1500" b="1" i="0" u="none">
+                <a:solidFill>
+                  <a:srgbClr val="334155"/>
+                </a:solidFill>
+                <a:latin typeface="Times New Roman"/>
+              </a:rPr>
+              <a:t>Admin Hệ thống</a:t>
+            </a:r>
+            <a:r>
+              <a:rPr sz="1500" b="0" i="0" u="none">
+                <a:solidFill>
+                  <a:srgbClr val="334155"/>
+                </a:solidFill>
+                <a:latin typeface="Times New Roman"/>
+              </a:rPr>
+              <a:t>, </a:t>
+            </a:r>
+            <a:r>
+              <a:rPr sz="1500" b="1" i="0" u="none">
+                <a:solidFill>
+                  <a:srgbClr val="334155"/>
+                </a:solidFill>
+                <a:latin typeface="Times New Roman"/>
+              </a:rPr>
+              <a:t>Phòng Đào tạo</a:t>
+            </a:r>
+            <a:r>
+              <a:rPr sz="1500" b="0" i="0" u="none">
+                <a:solidFill>
+                  <a:srgbClr val="334155"/>
+                </a:solidFill>
+                <a:latin typeface="Times New Roman"/>
+              </a:rPr>
+              <a:t>, và </a:t>
+            </a:r>
+            <a:r>
+              <a:rPr sz="1500" b="1" i="0" u="none">
+                <a:solidFill>
+                  <a:srgbClr val="334155"/>
+                </a:solidFill>
+                <a:latin typeface="Times New Roman"/>
+              </a:rPr>
+              <a:t>Giáo vụ Khoa</a:t>
+            </a:r>
+            <a:r>
+              <a:rPr sz="1500" b="0" i="0" u="none">
+                <a:solidFill>
+                  <a:srgbClr val="334155"/>
+                </a:solidFill>
+                <a:latin typeface="Times New Roman"/>
+              </a:rPr>
+              <a:t>. Chịu trách nhiệm quản lý danh mục, thiết lập đợt đăng ký và xuất dữ liệu.</a:t>
+            </a:r>
+          </a:p>
+        </p:txBody>
+      </p:sp>
+      <p:sp>
+        <p:nvSpPr>
+          <p:cNvPr id="8" name="TextBox 7"/>
+          <p:cNvSpPr txBox="1"/>
+          <p:nvPr/>
+        </p:nvSpPr>
+        <p:spPr>
+          <a:xfrm>
+            <a:off x="5399971" y="3448050"/>
+            <a:ext cx="1392205" cy="323850"/>
+          </a:xfrm>
+          <a:prstGeom prst="rect">
+            <a:avLst/>
+          </a:prstGeom>
+          <a:noFill/>
+        </p:spPr>
+        <p:txBody>
+          <a:bodyPr wrap="square" lIns="0" tIns="0" rIns="0" bIns="0" anchor="t">
+            <a:spAutoFit/>
+          </a:bodyPr>
+          <a:lstStyle/>
+          <a:p>
+            <a:pPr algn="ctr"/>
+            <a:r>
+              <a:rPr sz="2250" b="1" i="0" u="none">
+                <a:solidFill>
+                  <a:srgbClr val="1E293B"/>
+                </a:solidFill>
+                <a:latin typeface="Times New Roman"/>
+              </a:rPr>
+              <a:t>Giảng viên</a:t>
+            </a:r>
+          </a:p>
+        </p:txBody>
+      </p:sp>
+      <p:sp>
+        <p:nvSpPr>
+          <p:cNvPr id="9" name="TextBox 8"/>
+          <p:cNvSpPr txBox="1"/>
+          <p:nvPr/>
+        </p:nvSpPr>
+        <p:spPr>
+          <a:xfrm>
+            <a:off x="4645074" y="3914775"/>
+            <a:ext cx="2901999" cy="857250"/>
+          </a:xfrm>
+          <a:prstGeom prst="rect">
+            <a:avLst/>
+          </a:prstGeom>
+          <a:noFill/>
+        </p:spPr>
+        <p:txBody>
+          <a:bodyPr wrap="square" lIns="0" tIns="0" rIns="0" bIns="0" anchor="t">
+            <a:spAutoFit/>
+          </a:bodyPr>
+          <a:lstStyle/>
+          <a:p>
+            <a:pPr algn="ctr">
+              <a:lnSpc>
+                <a:spcPts val="2250"/>
+              </a:lnSpc>
+            </a:pPr>
+            <a:r>
+              <a:rPr sz="1500" b="0" i="0" u="none">
+                <a:solidFill>
+                  <a:srgbClr val="334155"/>
+                </a:solidFill>
+                <a:latin typeface="Times New Roman"/>
+              </a:rPr>
+              <a:t>Theo dõi danh sách sinh viên, trực tiếp xét duyệt các bản đề xuất đề tài đồ án và theo dõi tiến độ chung.</a:t>
+            </a:r>
+          </a:p>
+        </p:txBody>
+      </p:sp>
+      <p:sp>
+        <p:nvSpPr>
+          <p:cNvPr id="10" name="TextBox 9"/>
+          <p:cNvSpPr txBox="1"/>
+          <p:nvPr/>
+        </p:nvSpPr>
+        <p:spPr>
+          <a:xfrm>
+            <a:off x="9278127" y="3448050"/>
+            <a:ext cx="1192492" cy="323850"/>
+          </a:xfrm>
+          <a:prstGeom prst="rect">
+            <a:avLst/>
+          </a:prstGeom>
+          <a:noFill/>
+        </p:spPr>
+        <p:txBody>
+          <a:bodyPr wrap="square" lIns="0" tIns="0" rIns="0" bIns="0" anchor="t">
+            <a:spAutoFit/>
+          </a:bodyPr>
+          <a:lstStyle/>
+          <a:p>
+            <a:pPr algn="ctr"/>
+            <a:r>
+              <a:rPr sz="2250" b="1" i="0" u="none">
+                <a:solidFill>
+                  <a:srgbClr val="1E293B"/>
+                </a:solidFill>
+                <a:latin typeface="Times New Roman"/>
+              </a:rPr>
+              <a:t>Sinh viên</a:t>
+            </a:r>
+          </a:p>
+        </p:txBody>
+      </p:sp>
+      <p:sp>
+        <p:nvSpPr>
+          <p:cNvPr id="11" name="TextBox 10"/>
+          <p:cNvSpPr txBox="1"/>
+          <p:nvPr/>
+        </p:nvSpPr>
+        <p:spPr>
+          <a:xfrm>
+            <a:off x="8423374" y="3914775"/>
+            <a:ext cx="2901999" cy="1143000"/>
+          </a:xfrm>
+          <a:prstGeom prst="rect">
+            <a:avLst/>
+          </a:prstGeom>
+          <a:noFill/>
+        </p:spPr>
+        <p:txBody>
+          <a:bodyPr wrap="square" lIns="0" tIns="0" rIns="0" bIns="0" anchor="t">
+            <a:spAutoFit/>
+          </a:bodyPr>
+          <a:lstStyle/>
+          <a:p>
+            <a:pPr algn="ctr">
+              <a:lnSpc>
+                <a:spcPts val="2250"/>
+              </a:lnSpc>
+            </a:pPr>
+            <a:r>
+              <a:rPr sz="1500" b="0" i="0" u="none" dirty="0">
+                <a:solidFill>
+                  <a:srgbClr val="334155"/>
+                </a:solidFill>
+                <a:latin typeface="Times New Roman"/>
+              </a:rPr>
+              <a:t>Bao </a:t>
+            </a:r>
+            <a:r>
+              <a:rPr sz="1500" b="0" i="0" u="none" dirty="0" err="1">
+                <a:solidFill>
+                  <a:srgbClr val="334155"/>
+                </a:solidFill>
+                <a:latin typeface="Times New Roman"/>
+              </a:rPr>
+              <a:t>gồm</a:t>
+            </a:r>
+            <a:r>
+              <a:rPr sz="1500" b="0" i="0" u="none" dirty="0">
+                <a:solidFill>
+                  <a:srgbClr val="334155"/>
+                </a:solidFill>
+                <a:latin typeface="Times New Roman"/>
+              </a:rPr>
+              <a:t> </a:t>
+            </a:r>
+            <a:r>
+              <a:rPr sz="1500" b="1" i="0" u="none" dirty="0">
+                <a:solidFill>
+                  <a:srgbClr val="334155"/>
+                </a:solidFill>
+                <a:latin typeface="Times New Roman"/>
+              </a:rPr>
+              <a:t>Sinh </a:t>
+            </a:r>
+            <a:r>
+              <a:rPr sz="1500" b="1" i="0" u="none" dirty="0" err="1">
+                <a:solidFill>
+                  <a:srgbClr val="334155"/>
+                </a:solidFill>
+                <a:latin typeface="Times New Roman"/>
+              </a:rPr>
+              <a:t>viên</a:t>
+            </a:r>
+            <a:r>
+              <a:rPr sz="1500" b="0" i="0" u="none" dirty="0">
+                <a:solidFill>
+                  <a:srgbClr val="334155"/>
+                </a:solidFill>
+                <a:latin typeface="Times New Roman"/>
+              </a:rPr>
+              <a:t> </a:t>
+            </a:r>
+            <a:r>
+              <a:rPr sz="1500" b="0" i="0" u="none" dirty="0" err="1">
+                <a:solidFill>
+                  <a:srgbClr val="334155"/>
+                </a:solidFill>
+                <a:latin typeface="Times New Roman"/>
+              </a:rPr>
+              <a:t>và</a:t>
+            </a:r>
+            <a:r>
+              <a:rPr sz="1500" b="0" i="0" u="none" dirty="0">
+                <a:solidFill>
+                  <a:srgbClr val="334155"/>
+                </a:solidFill>
+                <a:latin typeface="Times New Roman"/>
+              </a:rPr>
+              <a:t> </a:t>
+            </a:r>
+            <a:r>
+              <a:rPr sz="1500" b="1" i="0" u="none" dirty="0" err="1">
+                <a:solidFill>
+                  <a:srgbClr val="334155"/>
+                </a:solidFill>
+                <a:latin typeface="Times New Roman"/>
+              </a:rPr>
+              <a:t>Trưởng</a:t>
+            </a:r>
+            <a:r>
+              <a:rPr sz="1500" b="1" i="0" u="none" dirty="0">
+                <a:solidFill>
+                  <a:srgbClr val="334155"/>
+                </a:solidFill>
+                <a:latin typeface="Times New Roman"/>
+              </a:rPr>
+              <a:t> </a:t>
+            </a:r>
+            <a:r>
+              <a:rPr sz="1500" b="1" i="0" u="none" dirty="0" err="1">
+                <a:solidFill>
+                  <a:srgbClr val="334155"/>
+                </a:solidFill>
+                <a:latin typeface="Times New Roman"/>
+              </a:rPr>
+              <a:t>nhóm</a:t>
+            </a:r>
+            <a:r>
+              <a:rPr sz="1500" b="0" i="0" u="none" dirty="0">
+                <a:solidFill>
+                  <a:srgbClr val="334155"/>
+                </a:solidFill>
+                <a:latin typeface="Times New Roman"/>
+              </a:rPr>
+              <a:t>. </a:t>
+            </a:r>
+            <a:r>
+              <a:rPr sz="1500" b="0" i="0" u="none" dirty="0" err="1">
+                <a:solidFill>
+                  <a:srgbClr val="334155"/>
+                </a:solidFill>
+                <a:latin typeface="Times New Roman"/>
+              </a:rPr>
+              <a:t>Tạo</a:t>
+            </a:r>
+            <a:r>
+              <a:rPr sz="1500" b="0" i="0" u="none" dirty="0">
+                <a:solidFill>
+                  <a:srgbClr val="334155"/>
+                </a:solidFill>
+                <a:latin typeface="Times New Roman"/>
+              </a:rPr>
+              <a:t>/</a:t>
+            </a:r>
+            <a:r>
+              <a:rPr sz="1500" b="0" i="0" u="none" dirty="0" err="1">
+                <a:solidFill>
+                  <a:srgbClr val="334155"/>
+                </a:solidFill>
+                <a:latin typeface="Times New Roman"/>
+              </a:rPr>
+              <a:t>tìm</a:t>
+            </a:r>
+            <a:r>
+              <a:rPr sz="1500" b="0" i="0" u="none" dirty="0">
+                <a:solidFill>
+                  <a:srgbClr val="334155"/>
+                </a:solidFill>
+                <a:latin typeface="Times New Roman"/>
+              </a:rPr>
+              <a:t> </a:t>
+            </a:r>
+            <a:r>
+              <a:rPr sz="1500" b="0" i="0" u="none" dirty="0" err="1">
+                <a:solidFill>
+                  <a:srgbClr val="334155"/>
+                </a:solidFill>
+                <a:latin typeface="Times New Roman"/>
+              </a:rPr>
+              <a:t>nhóm</a:t>
+            </a:r>
+            <a:r>
+              <a:rPr sz="1500" b="0" i="0" u="none" dirty="0">
+                <a:solidFill>
+                  <a:srgbClr val="334155"/>
+                </a:solidFill>
+                <a:latin typeface="Times New Roman"/>
+              </a:rPr>
+              <a:t>, </a:t>
+            </a:r>
+            <a:r>
+              <a:rPr sz="1500" b="0" i="0" u="none" dirty="0" err="1">
+                <a:solidFill>
+                  <a:srgbClr val="334155"/>
+                </a:solidFill>
+                <a:latin typeface="Times New Roman"/>
+              </a:rPr>
+              <a:t>nộp</a:t>
+            </a:r>
+            <a:r>
+              <a:rPr sz="1500" b="0" i="0" u="none" dirty="0">
+                <a:solidFill>
+                  <a:srgbClr val="334155"/>
+                </a:solidFill>
+                <a:latin typeface="Times New Roman"/>
+              </a:rPr>
+              <a:t> </a:t>
+            </a:r>
+            <a:r>
+              <a:rPr sz="1500" b="0" i="0" u="none" dirty="0" err="1">
+                <a:solidFill>
+                  <a:srgbClr val="334155"/>
+                </a:solidFill>
+                <a:latin typeface="Times New Roman"/>
+              </a:rPr>
+              <a:t>đề</a:t>
+            </a:r>
+            <a:r>
+              <a:rPr sz="1500" b="0" i="0" u="none" dirty="0">
+                <a:solidFill>
+                  <a:srgbClr val="334155"/>
+                </a:solidFill>
+                <a:latin typeface="Times New Roman"/>
+              </a:rPr>
+              <a:t> </a:t>
+            </a:r>
+            <a:r>
+              <a:rPr sz="1500" b="0" i="0" u="none" dirty="0" err="1">
+                <a:solidFill>
+                  <a:srgbClr val="334155"/>
+                </a:solidFill>
+                <a:latin typeface="Times New Roman"/>
+              </a:rPr>
+              <a:t>xuất</a:t>
+            </a:r>
+            <a:r>
+              <a:rPr sz="1500" b="0" i="0" u="none" dirty="0">
+                <a:solidFill>
+                  <a:srgbClr val="334155"/>
+                </a:solidFill>
+                <a:latin typeface="Times New Roman"/>
+              </a:rPr>
+              <a:t>, </a:t>
+            </a:r>
+            <a:r>
+              <a:rPr sz="1500" b="0" i="0" u="none" dirty="0" err="1">
+                <a:solidFill>
+                  <a:srgbClr val="334155"/>
+                </a:solidFill>
+                <a:latin typeface="Times New Roman"/>
+              </a:rPr>
+              <a:t>sử</a:t>
+            </a:r>
+            <a:r>
+              <a:rPr sz="1500" b="0" i="0" u="none" dirty="0">
+                <a:solidFill>
+                  <a:srgbClr val="334155"/>
+                </a:solidFill>
+                <a:latin typeface="Times New Roman"/>
+              </a:rPr>
+              <a:t> </a:t>
+            </a:r>
+            <a:r>
+              <a:rPr sz="1500" b="0" i="0" u="none" dirty="0" err="1">
+                <a:solidFill>
+                  <a:srgbClr val="334155"/>
+                </a:solidFill>
+                <a:latin typeface="Times New Roman"/>
+              </a:rPr>
+              <a:t>dụng</a:t>
+            </a:r>
+            <a:r>
+              <a:rPr sz="1500" b="0" i="0" u="none" dirty="0">
+                <a:solidFill>
+                  <a:srgbClr val="334155"/>
+                </a:solidFill>
+                <a:latin typeface="Times New Roman"/>
+              </a:rPr>
+              <a:t> AI </a:t>
+            </a:r>
+            <a:r>
+              <a:rPr sz="1500" b="0" i="0" u="none" dirty="0" err="1">
+                <a:solidFill>
+                  <a:srgbClr val="334155"/>
+                </a:solidFill>
+                <a:latin typeface="Times New Roman"/>
+              </a:rPr>
+              <a:t>gợi</a:t>
+            </a:r>
+            <a:r>
+              <a:rPr sz="1500" b="0" i="0" u="none" dirty="0">
+                <a:solidFill>
+                  <a:srgbClr val="334155"/>
+                </a:solidFill>
+                <a:latin typeface="Times New Roman"/>
+              </a:rPr>
+              <a:t> ý </a:t>
+            </a:r>
+            <a:r>
+              <a:rPr sz="1500" b="0" i="0" u="none" dirty="0" err="1">
+                <a:solidFill>
+                  <a:srgbClr val="334155"/>
+                </a:solidFill>
+                <a:latin typeface="Times New Roman"/>
+              </a:rPr>
+              <a:t>đề</a:t>
+            </a:r>
+            <a:r>
+              <a:rPr sz="1500" b="0" i="0" u="none" dirty="0">
+                <a:solidFill>
+                  <a:srgbClr val="334155"/>
+                </a:solidFill>
+                <a:latin typeface="Times New Roman"/>
+              </a:rPr>
+              <a:t> </a:t>
+            </a:r>
+            <a:r>
+              <a:rPr sz="1500" b="0" i="0" u="none" dirty="0" err="1">
+                <a:solidFill>
+                  <a:srgbClr val="334155"/>
+                </a:solidFill>
+                <a:latin typeface="Times New Roman"/>
+              </a:rPr>
+              <a:t>tài</a:t>
+            </a:r>
+            <a:r>
+              <a:rPr sz="1500" b="0" i="0" u="none" dirty="0">
+                <a:solidFill>
+                  <a:srgbClr val="334155"/>
+                </a:solidFill>
+                <a:latin typeface="Times New Roman"/>
+              </a:rPr>
+              <a:t> </a:t>
+            </a:r>
+            <a:r>
+              <a:rPr sz="1500" b="0" i="0" u="none" dirty="0" err="1">
+                <a:solidFill>
+                  <a:srgbClr val="334155"/>
+                </a:solidFill>
+                <a:latin typeface="Times New Roman"/>
+              </a:rPr>
+              <a:t>và</a:t>
+            </a:r>
+            <a:r>
+              <a:rPr sz="1500" b="0" i="0" u="none" dirty="0">
+                <a:solidFill>
+                  <a:srgbClr val="334155"/>
+                </a:solidFill>
+                <a:latin typeface="Times New Roman"/>
+              </a:rPr>
+              <a:t> </a:t>
+            </a:r>
+            <a:r>
+              <a:rPr sz="1500" b="0" i="0" u="none" dirty="0" err="1">
+                <a:solidFill>
+                  <a:srgbClr val="334155"/>
+                </a:solidFill>
+                <a:latin typeface="Times New Roman"/>
+              </a:rPr>
+              <a:t>trao</a:t>
+            </a:r>
+            <a:r>
+              <a:rPr sz="1500" b="0" i="0" u="none" dirty="0">
+                <a:solidFill>
+                  <a:srgbClr val="334155"/>
+                </a:solidFill>
+                <a:latin typeface="Times New Roman"/>
+              </a:rPr>
+              <a:t> </a:t>
+            </a:r>
+            <a:r>
+              <a:rPr sz="1500" b="0" i="0" u="none" dirty="0" err="1">
+                <a:solidFill>
+                  <a:srgbClr val="334155"/>
+                </a:solidFill>
+                <a:latin typeface="Times New Roman"/>
+              </a:rPr>
+              <a:t>đổi</a:t>
+            </a:r>
+            <a:r>
+              <a:rPr sz="1500" b="0" i="0" u="none" dirty="0">
+                <a:solidFill>
+                  <a:srgbClr val="334155"/>
+                </a:solidFill>
+                <a:latin typeface="Times New Roman"/>
+              </a:rPr>
+              <a:t> qua chat.</a:t>
+            </a:r>
           </a:p>
         </p:txBody>
       </p:sp>
       <p:pic>
         <p:nvPicPr>
-          <p:cNvPr id="7" name="Picture 6">
-            <a:extLst>
-              <a:ext uri="{FF2B5EF4-FFF2-40B4-BE49-F238E27FC236}">
-                <a16:creationId xmlns:a16="http://schemas.microsoft.com/office/drawing/2014/main" id="{F9F0DB04-444D-1480-9F57-CB88233AD4BA}"/>
-              </a:ext>
-            </a:extLst>
-          </p:cNvPr>
+          <p:cNvPr id="12" name="Picture 11" descr="image.png"/>
           <p:cNvPicPr>
             <a:picLocks noChangeAspect="1"/>
           </p:cNvPicPr>
           <p:nvPr/>
         </p:nvPicPr>
         <p:blipFill>
-          <a:blip r:embed="rId3"/>
+          <a:blip r:embed="rId7"/>
           <a:stretch>
             <a:fillRect/>
           </a:stretch>
         </p:blipFill>
         <p:spPr>
           <a:xfrm>
-            <a:off x="4714142" y="0"/>
-            <a:ext cx="6000750" cy="6858000"/>
+            <a:off x="2079575" y="2724150"/>
+            <a:ext cx="476250" cy="476250"/>
           </a:xfrm>
           <a:prstGeom prst="rect">
             <a:avLst/>
           </a:prstGeom>
         </p:spPr>
       </p:pic>
+      <p:pic>
+        <p:nvPicPr>
+          <p:cNvPr id="13" name="Picture 12" descr="image.png"/>
+          <p:cNvPicPr>
+            <a:picLocks noChangeAspect="1"/>
+          </p:cNvPicPr>
+          <p:nvPr/>
+        </p:nvPicPr>
+        <p:blipFill>
+          <a:blip r:embed="rId8"/>
+          <a:stretch>
+            <a:fillRect/>
+          </a:stretch>
+        </p:blipFill>
+        <p:spPr>
+          <a:xfrm>
+            <a:off x="5795962" y="2724150"/>
+            <a:ext cx="600075" cy="476250"/>
+          </a:xfrm>
+          <a:prstGeom prst="rect">
+            <a:avLst/>
+          </a:prstGeom>
+        </p:spPr>
+      </p:pic>
+      <p:pic>
+        <p:nvPicPr>
+          <p:cNvPr id="14" name="Picture 13" descr="image.png"/>
+          <p:cNvPicPr>
+            <a:picLocks noChangeAspect="1"/>
+          </p:cNvPicPr>
+          <p:nvPr/>
+        </p:nvPicPr>
+        <p:blipFill>
+          <a:blip r:embed="rId9"/>
+          <a:stretch>
+            <a:fillRect/>
+          </a:stretch>
+        </p:blipFill>
+        <p:spPr>
+          <a:xfrm>
+            <a:off x="9574262" y="2724150"/>
+            <a:ext cx="600075" cy="476250"/>
+          </a:xfrm>
+          <a:prstGeom prst="rect">
+            <a:avLst/>
+          </a:prstGeom>
+        </p:spPr>
+      </p:pic>
+      <p:sp>
+        <p:nvSpPr>
+          <p:cNvPr id="15" name="TextBox 14"/>
+          <p:cNvSpPr txBox="1"/>
+          <p:nvPr/>
+        </p:nvSpPr>
+        <p:spPr>
+          <a:xfrm>
+            <a:off x="571500" y="571500"/>
+            <a:ext cx="11601450" cy="523875"/>
+          </a:xfrm>
+          <a:prstGeom prst="rect">
+            <a:avLst/>
+          </a:prstGeom>
+          <a:noFill/>
+        </p:spPr>
+        <p:txBody>
+          <a:bodyPr wrap="square" lIns="0" tIns="0" rIns="0" bIns="0" anchor="t">
+            <a:spAutoFit/>
+          </a:bodyPr>
+          <a:lstStyle/>
+          <a:p>
+            <a:pPr algn="l"/>
+            <a:r>
+              <a:rPr sz="3450" b="1" i="0" u="none">
+                <a:solidFill>
+                  <a:srgbClr val="1E293B"/>
+                </a:solidFill>
+                <a:latin typeface="Times New Roman"/>
+              </a:rPr>
+              <a:t>Phân quyền Người dùng</a:t>
+            </a:r>
+          </a:p>
+        </p:txBody>
+      </p:sp>
+      <p:sp>
+        <p:nvSpPr>
+          <p:cNvPr id="16" name="Rectangle 15"/>
+          <p:cNvSpPr/>
+          <p:nvPr/>
+        </p:nvSpPr>
+        <p:spPr>
+          <a:xfrm>
+            <a:off x="571500" y="1219200"/>
+            <a:ext cx="11049000" cy="19050"/>
+          </a:xfrm>
+          <a:prstGeom prst="rect">
+            <a:avLst/>
+          </a:prstGeom>
+          <a:solidFill>
+            <a:srgbClr val="005088"/>
+          </a:solidFill>
+          <a:ln>
+            <a:noFill/>
+          </a:ln>
+          <a:effectLst/>
+        </p:spPr>
+        <p:style>
+          <a:lnRef idx="1">
+            <a:schemeClr val="accent1"/>
+          </a:lnRef>
+          <a:fillRef idx="3">
+            <a:schemeClr val="accent1"/>
+          </a:fillRef>
+          <a:effectRef idx="2">
+            <a:schemeClr val="accent1"/>
+          </a:effectRef>
+          <a:fontRef idx="minor">
+            <a:schemeClr val="lt1"/>
+          </a:fontRef>
+        </p:style>
+        <p:txBody>
+          <a:bodyPr rtlCol="0" anchor="ctr"/>
+          <a:lstStyle/>
+          <a:p>
+            <a:pPr algn="ctr"/>
+            <a:endParaRPr/>
+          </a:p>
+        </p:txBody>
+      </p:sp>
     </p:spTree>
   </p:cSld>
   <p:clrMapOvr>
